--- a/More Info/Updated.pptx
+++ b/More Info/Updated.pptx
@@ -15,15 +15,17 @@
     <p:sldId id="262" r:id="rId9"/>
     <p:sldId id="263" r:id="rId10"/>
     <p:sldId id="284" r:id="rId11"/>
-    <p:sldId id="266" r:id="rId12"/>
-    <p:sldId id="269" r:id="rId13"/>
-    <p:sldId id="287" r:id="rId14"/>
-    <p:sldId id="283" r:id="rId15"/>
-    <p:sldId id="280" r:id="rId16"/>
-    <p:sldId id="286" r:id="rId17"/>
-    <p:sldId id="281" r:id="rId18"/>
-    <p:sldId id="271" r:id="rId19"/>
-    <p:sldId id="276" r:id="rId20"/>
+    <p:sldId id="289" r:id="rId12"/>
+    <p:sldId id="290" r:id="rId13"/>
+    <p:sldId id="266" r:id="rId14"/>
+    <p:sldId id="269" r:id="rId15"/>
+    <p:sldId id="283" r:id="rId16"/>
+    <p:sldId id="280" r:id="rId17"/>
+    <p:sldId id="286" r:id="rId18"/>
+    <p:sldId id="288" r:id="rId19"/>
+    <p:sldId id="281" r:id="rId20"/>
+    <p:sldId id="271" r:id="rId21"/>
+    <p:sldId id="276" r:id="rId22"/>
   </p:sldIdLst>
   <p:sldSz cx="12192000" cy="6858000"/>
   <p:notesSz cx="6858000" cy="9144000"/>
@@ -4851,7 +4853,21 @@
               <a:latin typeface="Times New Roman" panose="02020603050405020304" pitchFamily="18" charset="0"/>
               <a:cs typeface="Times New Roman" panose="02020603050405020304" pitchFamily="18" charset="0"/>
             </a:rPr>
-            <a:t>To provide personalized yoga, diet, and meditation plans, making holistic Ayurvedic care easily accessible.</a:t>
+            <a:t>To provide </a:t>
+          </a:r>
+          <a:r>
+            <a:rPr lang="en-US" sz="2300" dirty="0" smtClean="0">
+              <a:latin typeface="Times New Roman" panose="02020603050405020304" pitchFamily="18" charset="0"/>
+              <a:cs typeface="Times New Roman" panose="02020603050405020304" pitchFamily="18" charset="0"/>
+            </a:rPr>
+            <a:t>yoga</a:t>
+          </a:r>
+          <a:r>
+            <a:rPr lang="en-US" sz="2300" dirty="0" smtClean="0">
+              <a:latin typeface="Times New Roman" panose="02020603050405020304" pitchFamily="18" charset="0"/>
+              <a:cs typeface="Times New Roman" panose="02020603050405020304" pitchFamily="18" charset="0"/>
+            </a:rPr>
+            <a:t>, diet, and meditation plans, making holistic Ayurvedic care easily accessible.</a:t>
           </a:r>
           <a:endParaRPr lang="en-US" sz="2300" dirty="0">
             <a:latin typeface="Times New Roman" panose="02020603050405020304" pitchFamily="18" charset="0"/>
@@ -6900,7 +6916,21 @@
               <a:latin typeface="Times New Roman" panose="02020603050405020304" pitchFamily="18" charset="0"/>
               <a:cs typeface="Times New Roman" panose="02020603050405020304" pitchFamily="18" charset="0"/>
             </a:rPr>
-            <a:t>To provide personalized yoga, diet, and meditation plans, making holistic Ayurvedic care easily accessible.</a:t>
+            <a:t>To provide </a:t>
+          </a:r>
+          <a:r>
+            <a:rPr lang="en-US" sz="2300" kern="1200" dirty="0" smtClean="0">
+              <a:latin typeface="Times New Roman" panose="02020603050405020304" pitchFamily="18" charset="0"/>
+              <a:cs typeface="Times New Roman" panose="02020603050405020304" pitchFamily="18" charset="0"/>
+            </a:rPr>
+            <a:t>yoga</a:t>
+          </a:r>
+          <a:r>
+            <a:rPr lang="en-US" sz="2300" kern="1200" dirty="0" smtClean="0">
+              <a:latin typeface="Times New Roman" panose="02020603050405020304" pitchFamily="18" charset="0"/>
+              <a:cs typeface="Times New Roman" panose="02020603050405020304" pitchFamily="18" charset="0"/>
+            </a:rPr>
+            <a:t>, diet, and meditation plans, making holistic Ayurvedic care easily accessible.</a:t>
           </a:r>
           <a:endParaRPr lang="en-US" sz="2300" kern="1200" dirty="0">
             <a:latin typeface="Times New Roman" panose="02020603050405020304" pitchFamily="18" charset="0"/>
@@ -14662,7 +14692,7 @@
           <a:p>
             <a:fld id="{1EE8454A-6B33-4DEF-8A40-161AC9C143C6}" type="datetimeFigureOut">
               <a:rPr lang="en-US" smtClean="0"/>
-              <a:t>7/1/2025</a:t>
+              <a:t>7/5/2025</a:t>
             </a:fld>
             <a:endParaRPr lang="en-US"/>
           </a:p>
@@ -14860,7 +14890,7 @@
           <a:p>
             <a:fld id="{1EE8454A-6B33-4DEF-8A40-161AC9C143C6}" type="datetimeFigureOut">
               <a:rPr lang="en-US" smtClean="0"/>
-              <a:t>7/1/2025</a:t>
+              <a:t>7/5/2025</a:t>
             </a:fld>
             <a:endParaRPr lang="en-US"/>
           </a:p>
@@ -15068,7 +15098,7 @@
           <a:p>
             <a:fld id="{1EE8454A-6B33-4DEF-8A40-161AC9C143C6}" type="datetimeFigureOut">
               <a:rPr lang="en-US" smtClean="0"/>
-              <a:t>7/1/2025</a:t>
+              <a:t>7/5/2025</a:t>
             </a:fld>
             <a:endParaRPr lang="en-US"/>
           </a:p>
@@ -15266,7 +15296,7 @@
           <a:p>
             <a:fld id="{1EE8454A-6B33-4DEF-8A40-161AC9C143C6}" type="datetimeFigureOut">
               <a:rPr lang="en-US" smtClean="0"/>
-              <a:t>7/1/2025</a:t>
+              <a:t>7/5/2025</a:t>
             </a:fld>
             <a:endParaRPr lang="en-US"/>
           </a:p>
@@ -15541,7 +15571,7 @@
           <a:p>
             <a:fld id="{1EE8454A-6B33-4DEF-8A40-161AC9C143C6}" type="datetimeFigureOut">
               <a:rPr lang="en-US" smtClean="0"/>
-              <a:t>7/1/2025</a:t>
+              <a:t>7/5/2025</a:t>
             </a:fld>
             <a:endParaRPr lang="en-US"/>
           </a:p>
@@ -15806,7 +15836,7 @@
           <a:p>
             <a:fld id="{1EE8454A-6B33-4DEF-8A40-161AC9C143C6}" type="datetimeFigureOut">
               <a:rPr lang="en-US" smtClean="0"/>
-              <a:t>7/1/2025</a:t>
+              <a:t>7/5/2025</a:t>
             </a:fld>
             <a:endParaRPr lang="en-US"/>
           </a:p>
@@ -16218,7 +16248,7 @@
           <a:p>
             <a:fld id="{1EE8454A-6B33-4DEF-8A40-161AC9C143C6}" type="datetimeFigureOut">
               <a:rPr lang="en-US" smtClean="0"/>
-              <a:t>7/1/2025</a:t>
+              <a:t>7/5/2025</a:t>
             </a:fld>
             <a:endParaRPr lang="en-US"/>
           </a:p>
@@ -16359,7 +16389,7 @@
           <a:p>
             <a:fld id="{1EE8454A-6B33-4DEF-8A40-161AC9C143C6}" type="datetimeFigureOut">
               <a:rPr lang="en-US" smtClean="0"/>
-              <a:t>7/1/2025</a:t>
+              <a:t>7/5/2025</a:t>
             </a:fld>
             <a:endParaRPr lang="en-US"/>
           </a:p>
@@ -16472,7 +16502,7 @@
           <a:p>
             <a:fld id="{1EE8454A-6B33-4DEF-8A40-161AC9C143C6}" type="datetimeFigureOut">
               <a:rPr lang="en-US" smtClean="0"/>
-              <a:t>7/1/2025</a:t>
+              <a:t>7/5/2025</a:t>
             </a:fld>
             <a:endParaRPr lang="en-US"/>
           </a:p>
@@ -16783,7 +16813,7 @@
           <a:p>
             <a:fld id="{1EE8454A-6B33-4DEF-8A40-161AC9C143C6}" type="datetimeFigureOut">
               <a:rPr lang="en-US" smtClean="0"/>
-              <a:t>7/1/2025</a:t>
+              <a:t>7/5/2025</a:t>
             </a:fld>
             <a:endParaRPr lang="en-US"/>
           </a:p>
@@ -17071,7 +17101,7 @@
           <a:p>
             <a:fld id="{1EE8454A-6B33-4DEF-8A40-161AC9C143C6}" type="datetimeFigureOut">
               <a:rPr lang="en-US" smtClean="0"/>
-              <a:t>7/1/2025</a:t>
+              <a:t>7/5/2025</a:t>
             </a:fld>
             <a:endParaRPr lang="en-US"/>
           </a:p>
@@ -17312,7 +17342,7 @@
           <a:p>
             <a:fld id="{1EE8454A-6B33-4DEF-8A40-161AC9C143C6}" type="datetimeFigureOut">
               <a:rPr lang="en-US" smtClean="0"/>
-              <a:t>7/1/2025</a:t>
+              <a:t>7/5/2025</a:t>
             </a:fld>
             <a:endParaRPr lang="en-US"/>
           </a:p>
@@ -19405,10 +19435,822 @@
   <p:clrMapOvr>
     <a:masterClrMapping/>
   </p:clrMapOvr>
+  <p:timing>
+    <p:tnLst>
+      <p:par>
+        <p:cTn id="1" dur="indefinite" restart="never" nodeType="tmRoot"/>
+      </p:par>
+    </p:tnLst>
+  </p:timing>
 </p:sld>
 </file>
 
 <file path=ppt/slides/slide11.xml><?xml version="1.0" encoding="utf-8"?>
+<p:sld xmlns:a="http://schemas.openxmlformats.org/drawingml/2006/main" xmlns:r="http://schemas.openxmlformats.org/officeDocument/2006/relationships" xmlns:p="http://schemas.openxmlformats.org/presentationml/2006/main">
+  <p:cSld>
+    <p:spTree>
+      <p:nvGrpSpPr>
+        <p:cNvPr id="1" name="">
+          <a:extLst>
+            <a:ext uri="{FF2B5EF4-FFF2-40B4-BE49-F238E27FC236}">
+              <a16:creationId xmlns:a16="http://schemas.microsoft.com/office/drawing/2014/main" id="{A4EB039B-D1B5-BDE0-B455-4FCF31B3848A}"/>
+            </a:ext>
+          </a:extLst>
+        </p:cNvPr>
+        <p:cNvGrpSpPr/>
+        <p:nvPr/>
+      </p:nvGrpSpPr>
+      <p:grpSpPr>
+        <a:xfrm>
+          <a:off x="0" y="0"/>
+          <a:ext cx="0" cy="0"/>
+          <a:chOff x="0" y="0"/>
+          <a:chExt cx="0" cy="0"/>
+        </a:xfrm>
+      </p:grpSpPr>
+      <p:sp>
+        <p:nvSpPr>
+          <p:cNvPr id="3" name="Title 1">
+            <a:extLst>
+              <a:ext uri="{FF2B5EF4-FFF2-40B4-BE49-F238E27FC236}">
+                <a16:creationId xmlns:a16="http://schemas.microsoft.com/office/drawing/2014/main" id="{09351AF8-B5B5-36A9-EB5C-49D13A586FC9}"/>
+              </a:ext>
+            </a:extLst>
+          </p:cNvPr>
+          <p:cNvSpPr txBox="1">
+            <a:spLocks/>
+          </p:cNvSpPr>
+          <p:nvPr/>
+        </p:nvSpPr>
+        <p:spPr>
+          <a:xfrm>
+            <a:off x="1148022" y="369587"/>
+            <a:ext cx="9895951" cy="1033669"/>
+          </a:xfrm>
+          <a:prstGeom prst="rect">
+            <a:avLst/>
+          </a:prstGeom>
+        </p:spPr>
+        <p:txBody>
+          <a:bodyPr vert="horz" lIns="91440" tIns="45720" rIns="91440" bIns="45720" rtlCol="0" anchor="ctr">
+            <a:normAutofit/>
+          </a:bodyPr>
+          <a:lstStyle>
+            <a:lvl1pPr algn="l" defTabSz="914400" rtl="0" eaLnBrk="1" latinLnBrk="0" hangingPunct="1">
+              <a:lnSpc>
+                <a:spcPct val="90000"/>
+              </a:lnSpc>
+              <a:spcBef>
+                <a:spcPct val="0"/>
+              </a:spcBef>
+              <a:buNone/>
+              <a:defRPr sz="4400" kern="1200">
+                <a:solidFill>
+                  <a:schemeClr val="tx1"/>
+                </a:solidFill>
+                <a:latin typeface="+mj-lt"/>
+                <a:ea typeface="+mj-ea"/>
+                <a:cs typeface="+mj-cs"/>
+              </a:defRPr>
+            </a:lvl1pPr>
+          </a:lstStyle>
+          <a:p>
+            <a:r>
+              <a:rPr lang="en-US" sz="3400" dirty="0">
+                <a:solidFill>
+                  <a:schemeClr val="bg1"/>
+                </a:solidFill>
+                <a:latin typeface="Times New Roman" panose="02020603050405020304" pitchFamily="18" charset="0"/>
+                <a:cs typeface="Times New Roman" panose="02020603050405020304" pitchFamily="18" charset="0"/>
+              </a:rPr>
+              <a:t>Nepal Ayurveda</a:t>
+            </a:r>
+          </a:p>
+        </p:txBody>
+      </p:sp>
+      <p:sp>
+        <p:nvSpPr>
+          <p:cNvPr id="5" name="Rectangle 1">
+            <a:extLst>
+              <a:ext uri="{FF2B5EF4-FFF2-40B4-BE49-F238E27FC236}">
+                <a16:creationId xmlns:a16="http://schemas.microsoft.com/office/drawing/2014/main" id="{B5CA9E86-1E91-E6A8-631D-5C10BF0BAB47}"/>
+              </a:ext>
+            </a:extLst>
+          </p:cNvPr>
+          <p:cNvSpPr txBox="1">
+            <a:spLocks noChangeArrowheads="1"/>
+          </p:cNvSpPr>
+          <p:nvPr/>
+        </p:nvSpPr>
+        <p:spPr bwMode="auto">
+          <a:xfrm>
+            <a:off x="2472612" y="369587"/>
+            <a:ext cx="8686800" cy="541175"/>
+          </a:xfrm>
+          <a:prstGeom prst="rect">
+            <a:avLst/>
+          </a:prstGeom>
+          <a:extLst>
+            <a:ext uri="{909E8E84-426E-40DD-AFC4-6F175D3DCCD1}">
+              <a14:hiddenFill xmlns:a14="http://schemas.microsoft.com/office/drawing/2010/main">
+                <a:solidFill>
+                  <a:schemeClr val="accent1"/>
+                </a:solidFill>
+              </a14:hiddenFill>
+            </a:ext>
+            <a:ext uri="{91240B29-F687-4F45-9708-019B960494DF}">
+              <a14:hiddenLine xmlns:a14="http://schemas.microsoft.com/office/drawing/2010/main" w="9525">
+                <a:solidFill>
+                  <a:schemeClr val="tx1"/>
+                </a:solidFill>
+                <a:miter lim="800000"/>
+                <a:headEnd/>
+                <a:tailEnd/>
+              </a14:hiddenLine>
+            </a:ext>
+            <a:ext uri="{AF507438-7753-43E0-B8FC-AC1667EBCBE1}">
+              <a14:hiddenEffects xmlns:a14="http://schemas.microsoft.com/office/drawing/2010/main">
+                <a:effectLst>
+                  <a:outerShdw dist="35921" dir="2700000" algn="ctr" rotWithShape="0">
+                    <a:schemeClr val="bg2"/>
+                  </a:outerShdw>
+                </a:effectLst>
+              </a14:hiddenEffects>
+            </a:ext>
+          </a:extLst>
+        </p:spPr>
+        <p:txBody>
+          <a:bodyPr vert="horz" lIns="91440" tIns="45720" rIns="91440" bIns="45720" numCol="1" rtlCol="0" anchor="ctr" anchorCtr="0" compatLnSpc="1">
+            <a:prstTxWarp prst="textNoShape">
+              <a:avLst/>
+            </a:prstTxWarp>
+            <a:noAutofit/>
+          </a:bodyPr>
+          <a:lstStyle>
+            <a:lvl1pPr marL="228600" indent="-228600" algn="l" defTabSz="914400" rtl="0" eaLnBrk="1" latinLnBrk="0" hangingPunct="1">
+              <a:lnSpc>
+                <a:spcPct val="90000"/>
+              </a:lnSpc>
+              <a:spcBef>
+                <a:spcPts val="1000"/>
+              </a:spcBef>
+              <a:buFont typeface="Arial" panose="020B0604020202020204" pitchFamily="34" charset="0"/>
+              <a:buChar char="•"/>
+              <a:defRPr sz="2800" kern="1200">
+                <a:solidFill>
+                  <a:schemeClr val="tx1"/>
+                </a:solidFill>
+                <a:latin typeface="+mn-lt"/>
+                <a:ea typeface="+mn-ea"/>
+                <a:cs typeface="+mn-cs"/>
+              </a:defRPr>
+            </a:lvl1pPr>
+            <a:lvl2pPr marL="685800" indent="-228600" algn="l" defTabSz="914400" rtl="0" eaLnBrk="1" latinLnBrk="0" hangingPunct="1">
+              <a:lnSpc>
+                <a:spcPct val="90000"/>
+              </a:lnSpc>
+              <a:spcBef>
+                <a:spcPts val="500"/>
+              </a:spcBef>
+              <a:buFont typeface="Arial" panose="020B0604020202020204" pitchFamily="34" charset="0"/>
+              <a:buChar char="•"/>
+              <a:defRPr sz="2400" kern="1200">
+                <a:solidFill>
+                  <a:schemeClr val="tx1"/>
+                </a:solidFill>
+                <a:latin typeface="+mn-lt"/>
+                <a:ea typeface="+mn-ea"/>
+                <a:cs typeface="+mn-cs"/>
+              </a:defRPr>
+            </a:lvl2pPr>
+            <a:lvl3pPr marL="1143000" indent="-228600" algn="l" defTabSz="914400" rtl="0" eaLnBrk="1" latinLnBrk="0" hangingPunct="1">
+              <a:lnSpc>
+                <a:spcPct val="90000"/>
+              </a:lnSpc>
+              <a:spcBef>
+                <a:spcPts val="500"/>
+              </a:spcBef>
+              <a:buFont typeface="Arial" panose="020B0604020202020204" pitchFamily="34" charset="0"/>
+              <a:buChar char="•"/>
+              <a:defRPr sz="2000" kern="1200">
+                <a:solidFill>
+                  <a:schemeClr val="tx1"/>
+                </a:solidFill>
+                <a:latin typeface="+mn-lt"/>
+                <a:ea typeface="+mn-ea"/>
+                <a:cs typeface="+mn-cs"/>
+              </a:defRPr>
+            </a:lvl3pPr>
+            <a:lvl4pPr marL="1600200" indent="-228600" algn="l" defTabSz="914400" rtl="0" eaLnBrk="1" latinLnBrk="0" hangingPunct="1">
+              <a:lnSpc>
+                <a:spcPct val="90000"/>
+              </a:lnSpc>
+              <a:spcBef>
+                <a:spcPts val="500"/>
+              </a:spcBef>
+              <a:buFont typeface="Arial" panose="020B0604020202020204" pitchFamily="34" charset="0"/>
+              <a:buChar char="•"/>
+              <a:defRPr sz="1800" kern="1200">
+                <a:solidFill>
+                  <a:schemeClr val="tx1"/>
+                </a:solidFill>
+                <a:latin typeface="+mn-lt"/>
+                <a:ea typeface="+mn-ea"/>
+                <a:cs typeface="+mn-cs"/>
+              </a:defRPr>
+            </a:lvl4pPr>
+            <a:lvl5pPr marL="2057400" indent="-228600" algn="l" defTabSz="914400" rtl="0" eaLnBrk="1" latinLnBrk="0" hangingPunct="1">
+              <a:lnSpc>
+                <a:spcPct val="90000"/>
+              </a:lnSpc>
+              <a:spcBef>
+                <a:spcPts val="500"/>
+              </a:spcBef>
+              <a:buFont typeface="Arial" panose="020B0604020202020204" pitchFamily="34" charset="0"/>
+              <a:buChar char="•"/>
+              <a:defRPr sz="1800" kern="1200">
+                <a:solidFill>
+                  <a:schemeClr val="tx1"/>
+                </a:solidFill>
+                <a:latin typeface="+mn-lt"/>
+                <a:ea typeface="+mn-ea"/>
+                <a:cs typeface="+mn-cs"/>
+              </a:defRPr>
+            </a:lvl5pPr>
+            <a:lvl6pPr marL="2514600" indent="-228600" algn="l" defTabSz="914400" rtl="0" eaLnBrk="1" latinLnBrk="0" hangingPunct="1">
+              <a:lnSpc>
+                <a:spcPct val="90000"/>
+              </a:lnSpc>
+              <a:spcBef>
+                <a:spcPts val="500"/>
+              </a:spcBef>
+              <a:buFont typeface="Arial" panose="020B0604020202020204" pitchFamily="34" charset="0"/>
+              <a:buChar char="•"/>
+              <a:defRPr sz="1800" kern="1200">
+                <a:solidFill>
+                  <a:schemeClr val="tx1"/>
+                </a:solidFill>
+                <a:latin typeface="+mn-lt"/>
+                <a:ea typeface="+mn-ea"/>
+                <a:cs typeface="+mn-cs"/>
+              </a:defRPr>
+            </a:lvl6pPr>
+            <a:lvl7pPr marL="2971800" indent="-228600" algn="l" defTabSz="914400" rtl="0" eaLnBrk="1" latinLnBrk="0" hangingPunct="1">
+              <a:lnSpc>
+                <a:spcPct val="90000"/>
+              </a:lnSpc>
+              <a:spcBef>
+                <a:spcPts val="500"/>
+              </a:spcBef>
+              <a:buFont typeface="Arial" panose="020B0604020202020204" pitchFamily="34" charset="0"/>
+              <a:buChar char="•"/>
+              <a:defRPr sz="1800" kern="1200">
+                <a:solidFill>
+                  <a:schemeClr val="tx1"/>
+                </a:solidFill>
+                <a:latin typeface="+mn-lt"/>
+                <a:ea typeface="+mn-ea"/>
+                <a:cs typeface="+mn-cs"/>
+              </a:defRPr>
+            </a:lvl7pPr>
+            <a:lvl8pPr marL="3429000" indent="-228600" algn="l" defTabSz="914400" rtl="0" eaLnBrk="1" latinLnBrk="0" hangingPunct="1">
+              <a:lnSpc>
+                <a:spcPct val="90000"/>
+              </a:lnSpc>
+              <a:spcBef>
+                <a:spcPts val="500"/>
+              </a:spcBef>
+              <a:buFont typeface="Arial" panose="020B0604020202020204" pitchFamily="34" charset="0"/>
+              <a:buChar char="•"/>
+              <a:defRPr sz="1800" kern="1200">
+                <a:solidFill>
+                  <a:schemeClr val="tx1"/>
+                </a:solidFill>
+                <a:latin typeface="+mn-lt"/>
+                <a:ea typeface="+mn-ea"/>
+                <a:cs typeface="+mn-cs"/>
+              </a:defRPr>
+            </a:lvl8pPr>
+            <a:lvl9pPr marL="3886200" indent="-228600" algn="l" defTabSz="914400" rtl="0" eaLnBrk="1" latinLnBrk="0" hangingPunct="1">
+              <a:lnSpc>
+                <a:spcPct val="90000"/>
+              </a:lnSpc>
+              <a:spcBef>
+                <a:spcPts val="500"/>
+              </a:spcBef>
+              <a:buFont typeface="Arial" panose="020B0604020202020204" pitchFamily="34" charset="0"/>
+              <a:buChar char="•"/>
+              <a:defRPr sz="1800" kern="1200">
+                <a:solidFill>
+                  <a:schemeClr val="tx1"/>
+                </a:solidFill>
+                <a:latin typeface="+mn-lt"/>
+                <a:ea typeface="+mn-ea"/>
+                <a:cs typeface="+mn-cs"/>
+              </a:defRPr>
+            </a:lvl9pPr>
+          </a:lstStyle>
+          <a:p>
+            <a:pPr marL="0" indent="0" eaLnBrk="0" fontAlgn="base" hangingPunct="0">
+              <a:lnSpc>
+                <a:spcPct val="170000"/>
+              </a:lnSpc>
+              <a:spcBef>
+                <a:spcPct val="0"/>
+              </a:spcBef>
+              <a:spcAft>
+                <a:spcPts val="600"/>
+              </a:spcAft>
+              <a:buFont typeface="Arial" panose="020B0604020202020204" pitchFamily="34" charset="0"/>
+              <a:buNone/>
+            </a:pPr>
+            <a:r>
+              <a:rPr lang="en-US" altLang="en-US" sz="3600" dirty="0" smtClean="0">
+                <a:latin typeface="Times New Roman" panose="02020603050405020304" pitchFamily="18" charset="0"/>
+                <a:cs typeface="Times New Roman" panose="02020603050405020304" pitchFamily="18" charset="0"/>
+              </a:rPr>
+              <a:t>Model Design For Image Classification</a:t>
+            </a:r>
+            <a:endParaRPr lang="en-US" altLang="en-US" sz="3600" dirty="0">
+              <a:latin typeface="Times New Roman" panose="02020603050405020304" pitchFamily="18" charset="0"/>
+              <a:cs typeface="Times New Roman" panose="02020603050405020304" pitchFamily="18" charset="0"/>
+            </a:endParaRPr>
+          </a:p>
+        </p:txBody>
+      </p:sp>
+      <p:pic>
+        <p:nvPicPr>
+          <p:cNvPr id="2050" name="Picture 2">
+            <a:extLst>
+              <a:ext uri="{FF2B5EF4-FFF2-40B4-BE49-F238E27FC236}">
+                <a16:creationId xmlns:a16="http://schemas.microsoft.com/office/drawing/2014/main" id="{C4B12015-C1F3-F194-FA70-AD336076B1E9}"/>
+              </a:ext>
+            </a:extLst>
+          </p:cNvPr>
+          <p:cNvPicPr>
+            <a:picLocks noChangeAspect="1" noChangeArrowheads="1"/>
+          </p:cNvPicPr>
+          <p:nvPr/>
+        </p:nvPicPr>
+        <p:blipFill>
+          <a:blip r:embed="rId2">
+            <a:extLst>
+              <a:ext uri="{28A0092B-C50C-407E-A947-70E740481C1C}">
+                <a14:useLocalDpi xmlns:a14="http://schemas.microsoft.com/office/drawing/2010/main" val="0"/>
+              </a:ext>
+            </a:extLst>
+          </a:blip>
+          <a:stretch>
+            <a:fillRect/>
+          </a:stretch>
+        </p:blipFill>
+        <p:spPr bwMode="auto">
+          <a:xfrm>
+            <a:off x="1744018" y="1840649"/>
+            <a:ext cx="8883549" cy="3814131"/>
+          </a:xfrm>
+          <a:prstGeom prst="rect">
+            <a:avLst/>
+          </a:prstGeom>
+          <a:noFill/>
+          <a:extLst>
+            <a:ext uri="{909E8E84-426E-40DD-AFC4-6F175D3DCCD1}">
+              <a14:hiddenFill xmlns:a14="http://schemas.microsoft.com/office/drawing/2010/main">
+                <a:solidFill>
+                  <a:srgbClr val="FFFFFF"/>
+                </a:solidFill>
+              </a14:hiddenFill>
+            </a:ext>
+          </a:extLst>
+        </p:spPr>
+      </p:pic>
+    </p:spTree>
+    <p:extLst>
+      <p:ext uri="{BB962C8B-B14F-4D97-AF65-F5344CB8AC3E}">
+        <p14:creationId xmlns:p14="http://schemas.microsoft.com/office/powerpoint/2010/main" val="267385763"/>
+      </p:ext>
+    </p:extLst>
+  </p:cSld>
+  <p:clrMapOvr>
+    <a:masterClrMapping/>
+  </p:clrMapOvr>
+  <p:timing>
+    <p:tnLst>
+      <p:par>
+        <p:cTn id="1" dur="indefinite" restart="never" nodeType="tmRoot"/>
+      </p:par>
+    </p:tnLst>
+  </p:timing>
+</p:sld>
+</file>
+
+<file path=ppt/slides/slide12.xml><?xml version="1.0" encoding="utf-8"?>
+<p:sld xmlns:a="http://schemas.openxmlformats.org/drawingml/2006/main" xmlns:r="http://schemas.openxmlformats.org/officeDocument/2006/relationships" xmlns:p="http://schemas.openxmlformats.org/presentationml/2006/main">
+  <p:cSld>
+    <p:spTree>
+      <p:nvGrpSpPr>
+        <p:cNvPr id="1" name="">
+          <a:extLst>
+            <a:ext uri="{FF2B5EF4-FFF2-40B4-BE49-F238E27FC236}">
+              <a16:creationId xmlns:a16="http://schemas.microsoft.com/office/drawing/2014/main" id="{A4EB039B-D1B5-BDE0-B455-4FCF31B3848A}"/>
+            </a:ext>
+          </a:extLst>
+        </p:cNvPr>
+        <p:cNvGrpSpPr/>
+        <p:nvPr/>
+      </p:nvGrpSpPr>
+      <p:grpSpPr>
+        <a:xfrm>
+          <a:off x="0" y="0"/>
+          <a:ext cx="0" cy="0"/>
+          <a:chOff x="0" y="0"/>
+          <a:chExt cx="0" cy="0"/>
+        </a:xfrm>
+      </p:grpSpPr>
+      <p:sp>
+        <p:nvSpPr>
+          <p:cNvPr id="3" name="Title 1">
+            <a:extLst>
+              <a:ext uri="{FF2B5EF4-FFF2-40B4-BE49-F238E27FC236}">
+                <a16:creationId xmlns:a16="http://schemas.microsoft.com/office/drawing/2014/main" id="{09351AF8-B5B5-36A9-EB5C-49D13A586FC9}"/>
+              </a:ext>
+            </a:extLst>
+          </p:cNvPr>
+          <p:cNvSpPr txBox="1">
+            <a:spLocks/>
+          </p:cNvSpPr>
+          <p:nvPr/>
+        </p:nvSpPr>
+        <p:spPr>
+          <a:xfrm>
+            <a:off x="1148022" y="369587"/>
+            <a:ext cx="9895951" cy="1033669"/>
+          </a:xfrm>
+          <a:prstGeom prst="rect">
+            <a:avLst/>
+          </a:prstGeom>
+        </p:spPr>
+        <p:txBody>
+          <a:bodyPr vert="horz" lIns="91440" tIns="45720" rIns="91440" bIns="45720" rtlCol="0" anchor="ctr">
+            <a:normAutofit/>
+          </a:bodyPr>
+          <a:lstStyle>
+            <a:lvl1pPr algn="l" defTabSz="914400" rtl="0" eaLnBrk="1" latinLnBrk="0" hangingPunct="1">
+              <a:lnSpc>
+                <a:spcPct val="90000"/>
+              </a:lnSpc>
+              <a:spcBef>
+                <a:spcPct val="0"/>
+              </a:spcBef>
+              <a:buNone/>
+              <a:defRPr sz="4400" kern="1200">
+                <a:solidFill>
+                  <a:schemeClr val="tx1"/>
+                </a:solidFill>
+                <a:latin typeface="+mj-lt"/>
+                <a:ea typeface="+mj-ea"/>
+                <a:cs typeface="+mj-cs"/>
+              </a:defRPr>
+            </a:lvl1pPr>
+          </a:lstStyle>
+          <a:p>
+            <a:r>
+              <a:rPr lang="en-US" sz="3400" dirty="0">
+                <a:solidFill>
+                  <a:schemeClr val="bg1"/>
+                </a:solidFill>
+                <a:latin typeface="Times New Roman" panose="02020603050405020304" pitchFamily="18" charset="0"/>
+                <a:cs typeface="Times New Roman" panose="02020603050405020304" pitchFamily="18" charset="0"/>
+              </a:rPr>
+              <a:t>Nepal Ayurveda</a:t>
+            </a:r>
+          </a:p>
+        </p:txBody>
+      </p:sp>
+      <p:sp>
+        <p:nvSpPr>
+          <p:cNvPr id="5" name="Rectangle 1">
+            <a:extLst>
+              <a:ext uri="{FF2B5EF4-FFF2-40B4-BE49-F238E27FC236}">
+                <a16:creationId xmlns:a16="http://schemas.microsoft.com/office/drawing/2014/main" id="{B5CA9E86-1E91-E6A8-631D-5C10BF0BAB47}"/>
+              </a:ext>
+            </a:extLst>
+          </p:cNvPr>
+          <p:cNvSpPr txBox="1">
+            <a:spLocks noChangeArrowheads="1"/>
+          </p:cNvSpPr>
+          <p:nvPr/>
+        </p:nvSpPr>
+        <p:spPr bwMode="auto">
+          <a:xfrm>
+            <a:off x="3433667" y="457200"/>
+            <a:ext cx="5906276" cy="541175"/>
+          </a:xfrm>
+          <a:prstGeom prst="rect">
+            <a:avLst/>
+          </a:prstGeom>
+          <a:extLst>
+            <a:ext uri="{909E8E84-426E-40DD-AFC4-6F175D3DCCD1}">
+              <a14:hiddenFill xmlns:a14="http://schemas.microsoft.com/office/drawing/2010/main">
+                <a:solidFill>
+                  <a:schemeClr val="accent1"/>
+                </a:solidFill>
+              </a14:hiddenFill>
+            </a:ext>
+            <a:ext uri="{91240B29-F687-4F45-9708-019B960494DF}">
+              <a14:hiddenLine xmlns:a14="http://schemas.microsoft.com/office/drawing/2010/main" w="9525">
+                <a:solidFill>
+                  <a:schemeClr val="tx1"/>
+                </a:solidFill>
+                <a:miter lim="800000"/>
+                <a:headEnd/>
+                <a:tailEnd/>
+              </a14:hiddenLine>
+            </a:ext>
+            <a:ext uri="{AF507438-7753-43E0-B8FC-AC1667EBCBE1}">
+              <a14:hiddenEffects xmlns:a14="http://schemas.microsoft.com/office/drawing/2010/main">
+                <a:effectLst>
+                  <a:outerShdw dist="35921" dir="2700000" algn="ctr" rotWithShape="0">
+                    <a:schemeClr val="bg2"/>
+                  </a:outerShdw>
+                </a:effectLst>
+              </a14:hiddenEffects>
+            </a:ext>
+          </a:extLst>
+        </p:spPr>
+        <p:txBody>
+          <a:bodyPr vert="horz" lIns="91440" tIns="45720" rIns="91440" bIns="45720" numCol="1" rtlCol="0" anchor="ctr" anchorCtr="0" compatLnSpc="1">
+            <a:prstTxWarp prst="textNoShape">
+              <a:avLst/>
+            </a:prstTxWarp>
+            <a:noAutofit/>
+          </a:bodyPr>
+          <a:lstStyle>
+            <a:lvl1pPr marL="228600" indent="-228600" algn="l" defTabSz="914400" rtl="0" eaLnBrk="1" latinLnBrk="0" hangingPunct="1">
+              <a:lnSpc>
+                <a:spcPct val="90000"/>
+              </a:lnSpc>
+              <a:spcBef>
+                <a:spcPts val="1000"/>
+              </a:spcBef>
+              <a:buFont typeface="Arial" panose="020B0604020202020204" pitchFamily="34" charset="0"/>
+              <a:buChar char="•"/>
+              <a:defRPr sz="2800" kern="1200">
+                <a:solidFill>
+                  <a:schemeClr val="tx1"/>
+                </a:solidFill>
+                <a:latin typeface="+mn-lt"/>
+                <a:ea typeface="+mn-ea"/>
+                <a:cs typeface="+mn-cs"/>
+              </a:defRPr>
+            </a:lvl1pPr>
+            <a:lvl2pPr marL="685800" indent="-228600" algn="l" defTabSz="914400" rtl="0" eaLnBrk="1" latinLnBrk="0" hangingPunct="1">
+              <a:lnSpc>
+                <a:spcPct val="90000"/>
+              </a:lnSpc>
+              <a:spcBef>
+                <a:spcPts val="500"/>
+              </a:spcBef>
+              <a:buFont typeface="Arial" panose="020B0604020202020204" pitchFamily="34" charset="0"/>
+              <a:buChar char="•"/>
+              <a:defRPr sz="2400" kern="1200">
+                <a:solidFill>
+                  <a:schemeClr val="tx1"/>
+                </a:solidFill>
+                <a:latin typeface="+mn-lt"/>
+                <a:ea typeface="+mn-ea"/>
+                <a:cs typeface="+mn-cs"/>
+              </a:defRPr>
+            </a:lvl2pPr>
+            <a:lvl3pPr marL="1143000" indent="-228600" algn="l" defTabSz="914400" rtl="0" eaLnBrk="1" latinLnBrk="0" hangingPunct="1">
+              <a:lnSpc>
+                <a:spcPct val="90000"/>
+              </a:lnSpc>
+              <a:spcBef>
+                <a:spcPts val="500"/>
+              </a:spcBef>
+              <a:buFont typeface="Arial" panose="020B0604020202020204" pitchFamily="34" charset="0"/>
+              <a:buChar char="•"/>
+              <a:defRPr sz="2000" kern="1200">
+                <a:solidFill>
+                  <a:schemeClr val="tx1"/>
+                </a:solidFill>
+                <a:latin typeface="+mn-lt"/>
+                <a:ea typeface="+mn-ea"/>
+                <a:cs typeface="+mn-cs"/>
+              </a:defRPr>
+            </a:lvl3pPr>
+            <a:lvl4pPr marL="1600200" indent="-228600" algn="l" defTabSz="914400" rtl="0" eaLnBrk="1" latinLnBrk="0" hangingPunct="1">
+              <a:lnSpc>
+                <a:spcPct val="90000"/>
+              </a:lnSpc>
+              <a:spcBef>
+                <a:spcPts val="500"/>
+              </a:spcBef>
+              <a:buFont typeface="Arial" panose="020B0604020202020204" pitchFamily="34" charset="0"/>
+              <a:buChar char="•"/>
+              <a:defRPr sz="1800" kern="1200">
+                <a:solidFill>
+                  <a:schemeClr val="tx1"/>
+                </a:solidFill>
+                <a:latin typeface="+mn-lt"/>
+                <a:ea typeface="+mn-ea"/>
+                <a:cs typeface="+mn-cs"/>
+              </a:defRPr>
+            </a:lvl4pPr>
+            <a:lvl5pPr marL="2057400" indent="-228600" algn="l" defTabSz="914400" rtl="0" eaLnBrk="1" latinLnBrk="0" hangingPunct="1">
+              <a:lnSpc>
+                <a:spcPct val="90000"/>
+              </a:lnSpc>
+              <a:spcBef>
+                <a:spcPts val="500"/>
+              </a:spcBef>
+              <a:buFont typeface="Arial" panose="020B0604020202020204" pitchFamily="34" charset="0"/>
+              <a:buChar char="•"/>
+              <a:defRPr sz="1800" kern="1200">
+                <a:solidFill>
+                  <a:schemeClr val="tx1"/>
+                </a:solidFill>
+                <a:latin typeface="+mn-lt"/>
+                <a:ea typeface="+mn-ea"/>
+                <a:cs typeface="+mn-cs"/>
+              </a:defRPr>
+            </a:lvl5pPr>
+            <a:lvl6pPr marL="2514600" indent="-228600" algn="l" defTabSz="914400" rtl="0" eaLnBrk="1" latinLnBrk="0" hangingPunct="1">
+              <a:lnSpc>
+                <a:spcPct val="90000"/>
+              </a:lnSpc>
+              <a:spcBef>
+                <a:spcPts val="500"/>
+              </a:spcBef>
+              <a:buFont typeface="Arial" panose="020B0604020202020204" pitchFamily="34" charset="0"/>
+              <a:buChar char="•"/>
+              <a:defRPr sz="1800" kern="1200">
+                <a:solidFill>
+                  <a:schemeClr val="tx1"/>
+                </a:solidFill>
+                <a:latin typeface="+mn-lt"/>
+                <a:ea typeface="+mn-ea"/>
+                <a:cs typeface="+mn-cs"/>
+              </a:defRPr>
+            </a:lvl6pPr>
+            <a:lvl7pPr marL="2971800" indent="-228600" algn="l" defTabSz="914400" rtl="0" eaLnBrk="1" latinLnBrk="0" hangingPunct="1">
+              <a:lnSpc>
+                <a:spcPct val="90000"/>
+              </a:lnSpc>
+              <a:spcBef>
+                <a:spcPts val="500"/>
+              </a:spcBef>
+              <a:buFont typeface="Arial" panose="020B0604020202020204" pitchFamily="34" charset="0"/>
+              <a:buChar char="•"/>
+              <a:defRPr sz="1800" kern="1200">
+                <a:solidFill>
+                  <a:schemeClr val="tx1"/>
+                </a:solidFill>
+                <a:latin typeface="+mn-lt"/>
+                <a:ea typeface="+mn-ea"/>
+                <a:cs typeface="+mn-cs"/>
+              </a:defRPr>
+            </a:lvl7pPr>
+            <a:lvl8pPr marL="3429000" indent="-228600" algn="l" defTabSz="914400" rtl="0" eaLnBrk="1" latinLnBrk="0" hangingPunct="1">
+              <a:lnSpc>
+                <a:spcPct val="90000"/>
+              </a:lnSpc>
+              <a:spcBef>
+                <a:spcPts val="500"/>
+              </a:spcBef>
+              <a:buFont typeface="Arial" panose="020B0604020202020204" pitchFamily="34" charset="0"/>
+              <a:buChar char="•"/>
+              <a:defRPr sz="1800" kern="1200">
+                <a:solidFill>
+                  <a:schemeClr val="tx1"/>
+                </a:solidFill>
+                <a:latin typeface="+mn-lt"/>
+                <a:ea typeface="+mn-ea"/>
+                <a:cs typeface="+mn-cs"/>
+              </a:defRPr>
+            </a:lvl8pPr>
+            <a:lvl9pPr marL="3886200" indent="-228600" algn="l" defTabSz="914400" rtl="0" eaLnBrk="1" latinLnBrk="0" hangingPunct="1">
+              <a:lnSpc>
+                <a:spcPct val="90000"/>
+              </a:lnSpc>
+              <a:spcBef>
+                <a:spcPts val="500"/>
+              </a:spcBef>
+              <a:buFont typeface="Arial" panose="020B0604020202020204" pitchFamily="34" charset="0"/>
+              <a:buChar char="•"/>
+              <a:defRPr sz="1800" kern="1200">
+                <a:solidFill>
+                  <a:schemeClr val="tx1"/>
+                </a:solidFill>
+                <a:latin typeface="+mn-lt"/>
+                <a:ea typeface="+mn-ea"/>
+                <a:cs typeface="+mn-cs"/>
+              </a:defRPr>
+            </a:lvl9pPr>
+          </a:lstStyle>
+          <a:p>
+            <a:pPr marL="0" indent="0" eaLnBrk="0" fontAlgn="base" hangingPunct="0">
+              <a:lnSpc>
+                <a:spcPct val="170000"/>
+              </a:lnSpc>
+              <a:spcBef>
+                <a:spcPct val="0"/>
+              </a:spcBef>
+              <a:spcAft>
+                <a:spcPts val="600"/>
+              </a:spcAft>
+              <a:buFont typeface="Arial" panose="020B0604020202020204" pitchFamily="34" charset="0"/>
+              <a:buNone/>
+            </a:pPr>
+            <a:r>
+              <a:rPr lang="en-US" altLang="en-US" sz="3600" dirty="0" smtClean="0">
+                <a:latin typeface="Times New Roman" panose="02020603050405020304" pitchFamily="18" charset="0"/>
+                <a:cs typeface="Times New Roman" panose="02020603050405020304" pitchFamily="18" charset="0"/>
+              </a:rPr>
+              <a:t>Model Design of </a:t>
+            </a:r>
+            <a:r>
+              <a:rPr lang="en-US" altLang="en-US" sz="3600" dirty="0" err="1" smtClean="0">
+                <a:latin typeface="Times New Roman" panose="02020603050405020304" pitchFamily="18" charset="0"/>
+                <a:cs typeface="Times New Roman" panose="02020603050405020304" pitchFamily="18" charset="0"/>
+              </a:rPr>
+              <a:t>Chatbot</a:t>
+            </a:r>
+            <a:endParaRPr lang="en-US" altLang="en-US" sz="3600" dirty="0">
+              <a:latin typeface="Times New Roman" panose="02020603050405020304" pitchFamily="18" charset="0"/>
+              <a:cs typeface="Times New Roman" panose="02020603050405020304" pitchFamily="18" charset="0"/>
+            </a:endParaRPr>
+          </a:p>
+        </p:txBody>
+      </p:sp>
+      <p:pic>
+        <p:nvPicPr>
+          <p:cNvPr id="2050" name="Picture 2">
+            <a:extLst>
+              <a:ext uri="{FF2B5EF4-FFF2-40B4-BE49-F238E27FC236}">
+                <a16:creationId xmlns:a16="http://schemas.microsoft.com/office/drawing/2014/main" id="{C4B12015-C1F3-F194-FA70-AD336076B1E9}"/>
+              </a:ext>
+            </a:extLst>
+          </p:cNvPr>
+          <p:cNvPicPr>
+            <a:picLocks noChangeAspect="1" noChangeArrowheads="1"/>
+          </p:cNvPicPr>
+          <p:nvPr/>
+        </p:nvPicPr>
+        <p:blipFill>
+          <a:blip r:embed="rId2">
+            <a:extLst>
+              <a:ext uri="{28A0092B-C50C-407E-A947-70E740481C1C}">
+                <a14:useLocalDpi xmlns:a14="http://schemas.microsoft.com/office/drawing/2010/main" val="0"/>
+              </a:ext>
+            </a:extLst>
+          </a:blip>
+          <a:stretch>
+            <a:fillRect/>
+          </a:stretch>
+        </p:blipFill>
+        <p:spPr bwMode="auto">
+          <a:xfrm>
+            <a:off x="2105413" y="1784665"/>
+            <a:ext cx="8160755" cy="3814131"/>
+          </a:xfrm>
+          <a:prstGeom prst="rect">
+            <a:avLst/>
+          </a:prstGeom>
+          <a:noFill/>
+          <a:extLst>
+            <a:ext uri="{909E8E84-426E-40DD-AFC4-6F175D3DCCD1}">
+              <a14:hiddenFill xmlns:a14="http://schemas.microsoft.com/office/drawing/2010/main">
+                <a:solidFill>
+                  <a:srgbClr val="FFFFFF"/>
+                </a:solidFill>
+              </a14:hiddenFill>
+            </a:ext>
+          </a:extLst>
+        </p:spPr>
+      </p:pic>
+    </p:spTree>
+    <p:extLst>
+      <p:ext uri="{BB962C8B-B14F-4D97-AF65-F5344CB8AC3E}">
+        <p14:creationId xmlns:p14="http://schemas.microsoft.com/office/powerpoint/2010/main" val="1333752905"/>
+      </p:ext>
+    </p:extLst>
+  </p:cSld>
+  <p:clrMapOvr>
+    <a:masterClrMapping/>
+  </p:clrMapOvr>
+  <p:timing>
+    <p:tnLst>
+      <p:par>
+        <p:cTn id="1" dur="indefinite" restart="never" nodeType="tmRoot"/>
+      </p:par>
+    </p:tnLst>
+  </p:timing>
+</p:sld>
+</file>
+
+<file path=ppt/slides/slide13.xml><?xml version="1.0" encoding="utf-8"?>
 <p:sld xmlns:a="http://schemas.openxmlformats.org/drawingml/2006/main" xmlns:r="http://schemas.openxmlformats.org/officeDocument/2006/relationships" xmlns:p="http://schemas.openxmlformats.org/presentationml/2006/main">
   <p:cSld>
     <p:bg>
@@ -20075,7 +20917,7 @@
 </p:sld>
 </file>
 
-<file path=ppt/slides/slide12.xml><?xml version="1.0" encoding="utf-8"?>
+<file path=ppt/slides/slide14.xml><?xml version="1.0" encoding="utf-8"?>
 <p:sld xmlns:a="http://schemas.openxmlformats.org/drawingml/2006/main" xmlns:r="http://schemas.openxmlformats.org/officeDocument/2006/relationships" xmlns:p="http://schemas.openxmlformats.org/presentationml/2006/main">
   <p:cSld>
     <p:spTree>
@@ -20141,7 +20983,7 @@
         <p:spPr>
           <a:xfrm>
             <a:off x="324091" y="995423"/>
-            <a:ext cx="10961225" cy="6093976"/>
+            <a:ext cx="10961225" cy="6555641"/>
           </a:xfrm>
           <a:prstGeom prst="rect">
             <a:avLst/>
@@ -20381,6 +21223,26 @@
             </a:r>
           </a:p>
           <a:p>
+            <a:pPr marL="342900" indent="-342900" algn="ctr">
+              <a:lnSpc>
+                <a:spcPct val="150000"/>
+              </a:lnSpc>
+              <a:buFont typeface="Arial" panose="020B0604020202020204" pitchFamily="34" charset="0"/>
+              <a:buChar char="•"/>
+            </a:pPr>
+            <a:r>
+              <a:rPr lang="en-US" sz="2000" b="1" dirty="0" smtClean="0">
+                <a:latin typeface="Times New Roman" panose="02020603050405020304" pitchFamily="18" charset="0"/>
+                <a:cs typeface="Times New Roman" panose="02020603050405020304" pitchFamily="18" charset="0"/>
+              </a:rPr>
+              <a:t>LR=0.001 BATCH_SIZE=32 EPOCH=20</a:t>
+            </a:r>
+            <a:endParaRPr lang="en-US" sz="2000" b="1" dirty="0" smtClean="0">
+              <a:latin typeface="Times New Roman" panose="02020603050405020304" pitchFamily="18" charset="0"/>
+              <a:cs typeface="Times New Roman" panose="02020603050405020304" pitchFamily="18" charset="0"/>
+            </a:endParaRPr>
+          </a:p>
+          <a:p>
             <a:pPr marL="342900" indent="-342900">
               <a:lnSpc>
                 <a:spcPct val="150000"/>
@@ -20428,349 +21290,7 @@
 </p:sld>
 </file>
 
-<file path=ppt/slides/slide13.xml><?xml version="1.0" encoding="utf-8"?>
-<p:sld xmlns:a="http://schemas.openxmlformats.org/drawingml/2006/main" xmlns:r="http://schemas.openxmlformats.org/officeDocument/2006/relationships" xmlns:p="http://schemas.openxmlformats.org/presentationml/2006/main">
-  <p:cSld>
-    <p:spTree>
-      <p:nvGrpSpPr>
-        <p:cNvPr id="1" name="">
-          <a:extLst>
-            <a:ext uri="{FF2B5EF4-FFF2-40B4-BE49-F238E27FC236}">
-              <a16:creationId xmlns:a16="http://schemas.microsoft.com/office/drawing/2014/main" id="{594A379E-9909-AA69-EF88-EDF3556FA848}"/>
-            </a:ext>
-          </a:extLst>
-        </p:cNvPr>
-        <p:cNvGrpSpPr/>
-        <p:nvPr/>
-      </p:nvGrpSpPr>
-      <p:grpSpPr>
-        <a:xfrm>
-          <a:off x="0" y="0"/>
-          <a:ext cx="0" cy="0"/>
-          <a:chOff x="0" y="0"/>
-          <a:chExt cx="0" cy="0"/>
-        </a:xfrm>
-      </p:grpSpPr>
-      <p:sp>
-        <p:nvSpPr>
-          <p:cNvPr id="2" name="Title 1">
-            <a:extLst>
-              <a:ext uri="{FF2B5EF4-FFF2-40B4-BE49-F238E27FC236}">
-                <a16:creationId xmlns:a16="http://schemas.microsoft.com/office/drawing/2014/main" id="{E8282EE8-921E-B213-5D20-94242BEF75E7}"/>
-              </a:ext>
-            </a:extLst>
-          </p:cNvPr>
-          <p:cNvSpPr>
-            <a:spLocks noGrp="1"/>
-          </p:cNvSpPr>
-          <p:nvPr>
-            <p:ph type="title"/>
-          </p:nvPr>
-        </p:nvSpPr>
-        <p:spPr>
-          <a:xfrm>
-            <a:off x="391887" y="195943"/>
-            <a:ext cx="11023734" cy="1030651"/>
-          </a:xfrm>
-        </p:spPr>
-        <p:txBody>
-          <a:bodyPr anchor="ctr">
-            <a:normAutofit/>
-          </a:bodyPr>
-          <a:lstStyle/>
-          <a:p>
-            <a:pPr algn="ctr"/>
-            <a:r>
-              <a:rPr lang="en-GB" sz="4000" dirty="0" smtClean="0">
-                <a:latin typeface="Times New Roman" panose="02020603050405020304" pitchFamily="18" charset="0"/>
-                <a:cs typeface="Times New Roman" panose="02020603050405020304" pitchFamily="18" charset="0"/>
-              </a:rPr>
-              <a:t>BLEU Score</a:t>
-            </a:r>
-            <a:endParaRPr lang="en-US" sz="4000" dirty="0">
-              <a:latin typeface="Times New Roman" panose="02020603050405020304" pitchFamily="18" charset="0"/>
-              <a:cs typeface="Times New Roman" panose="02020603050405020304" pitchFamily="18" charset="0"/>
-            </a:endParaRPr>
-          </a:p>
-        </p:txBody>
-      </p:sp>
-      <p:sp>
-        <p:nvSpPr>
-          <p:cNvPr id="8" name="Content Placeholder 3">
-            <a:extLst>
-              <a:ext uri="{FF2B5EF4-FFF2-40B4-BE49-F238E27FC236}">
-                <a16:creationId xmlns:a16="http://schemas.microsoft.com/office/drawing/2014/main" id="{8C5332C2-AE57-D734-2487-DE6AB11594DA}"/>
-              </a:ext>
-            </a:extLst>
-          </p:cNvPr>
-          <p:cNvSpPr txBox="1">
-            <a:spLocks/>
-          </p:cNvSpPr>
-          <p:nvPr/>
-        </p:nvSpPr>
-        <p:spPr>
-          <a:xfrm>
-            <a:off x="7557794" y="1978090"/>
-            <a:ext cx="4329404" cy="3559239"/>
-          </a:xfrm>
-          <a:prstGeom prst="rect">
-            <a:avLst/>
-          </a:prstGeom>
-        </p:spPr>
-        <p:txBody>
-          <a:bodyPr vert="horz" lIns="91440" tIns="45720" rIns="91440" bIns="45720" rtlCol="0">
-            <a:noAutofit/>
-          </a:bodyPr>
-          <a:lstStyle>
-            <a:lvl1pPr marL="228600" indent="-228600" algn="l" defTabSz="914400" rtl="0" eaLnBrk="1" latinLnBrk="0" hangingPunct="1">
-              <a:lnSpc>
-                <a:spcPct val="90000"/>
-              </a:lnSpc>
-              <a:spcBef>
-                <a:spcPts val="1000"/>
-              </a:spcBef>
-              <a:buFont typeface="Arial" panose="020B0604020202020204" pitchFamily="34" charset="0"/>
-              <a:buChar char="•"/>
-              <a:defRPr sz="2800" kern="1200">
-                <a:solidFill>
-                  <a:schemeClr val="tx1"/>
-                </a:solidFill>
-                <a:latin typeface="+mn-lt"/>
-                <a:ea typeface="+mn-ea"/>
-                <a:cs typeface="+mn-cs"/>
-              </a:defRPr>
-            </a:lvl1pPr>
-            <a:lvl2pPr marL="685800" indent="-228600" algn="l" defTabSz="914400" rtl="0" eaLnBrk="1" latinLnBrk="0" hangingPunct="1">
-              <a:lnSpc>
-                <a:spcPct val="90000"/>
-              </a:lnSpc>
-              <a:spcBef>
-                <a:spcPts val="500"/>
-              </a:spcBef>
-              <a:buFont typeface="Arial" panose="020B0604020202020204" pitchFamily="34" charset="0"/>
-              <a:buChar char="•"/>
-              <a:defRPr sz="2400" kern="1200">
-                <a:solidFill>
-                  <a:schemeClr val="tx1"/>
-                </a:solidFill>
-                <a:latin typeface="+mn-lt"/>
-                <a:ea typeface="+mn-ea"/>
-                <a:cs typeface="+mn-cs"/>
-              </a:defRPr>
-            </a:lvl2pPr>
-            <a:lvl3pPr marL="1143000" indent="-228600" algn="l" defTabSz="914400" rtl="0" eaLnBrk="1" latinLnBrk="0" hangingPunct="1">
-              <a:lnSpc>
-                <a:spcPct val="90000"/>
-              </a:lnSpc>
-              <a:spcBef>
-                <a:spcPts val="500"/>
-              </a:spcBef>
-              <a:buFont typeface="Arial" panose="020B0604020202020204" pitchFamily="34" charset="0"/>
-              <a:buChar char="•"/>
-              <a:defRPr sz="2000" kern="1200">
-                <a:solidFill>
-                  <a:schemeClr val="tx1"/>
-                </a:solidFill>
-                <a:latin typeface="+mn-lt"/>
-                <a:ea typeface="+mn-ea"/>
-                <a:cs typeface="+mn-cs"/>
-              </a:defRPr>
-            </a:lvl3pPr>
-            <a:lvl4pPr marL="1600200" indent="-228600" algn="l" defTabSz="914400" rtl="0" eaLnBrk="1" latinLnBrk="0" hangingPunct="1">
-              <a:lnSpc>
-                <a:spcPct val="90000"/>
-              </a:lnSpc>
-              <a:spcBef>
-                <a:spcPts val="500"/>
-              </a:spcBef>
-              <a:buFont typeface="Arial" panose="020B0604020202020204" pitchFamily="34" charset="0"/>
-              <a:buChar char="•"/>
-              <a:defRPr sz="1800" kern="1200">
-                <a:solidFill>
-                  <a:schemeClr val="tx1"/>
-                </a:solidFill>
-                <a:latin typeface="+mn-lt"/>
-                <a:ea typeface="+mn-ea"/>
-                <a:cs typeface="+mn-cs"/>
-              </a:defRPr>
-            </a:lvl4pPr>
-            <a:lvl5pPr marL="2057400" indent="-228600" algn="l" defTabSz="914400" rtl="0" eaLnBrk="1" latinLnBrk="0" hangingPunct="1">
-              <a:lnSpc>
-                <a:spcPct val="90000"/>
-              </a:lnSpc>
-              <a:spcBef>
-                <a:spcPts val="500"/>
-              </a:spcBef>
-              <a:buFont typeface="Arial" panose="020B0604020202020204" pitchFamily="34" charset="0"/>
-              <a:buChar char="•"/>
-              <a:defRPr sz="1800" kern="1200">
-                <a:solidFill>
-                  <a:schemeClr val="tx1"/>
-                </a:solidFill>
-                <a:latin typeface="+mn-lt"/>
-                <a:ea typeface="+mn-ea"/>
-                <a:cs typeface="+mn-cs"/>
-              </a:defRPr>
-            </a:lvl5pPr>
-            <a:lvl6pPr marL="2514600" indent="-228600" algn="l" defTabSz="914400" rtl="0" eaLnBrk="1" latinLnBrk="0" hangingPunct="1">
-              <a:lnSpc>
-                <a:spcPct val="90000"/>
-              </a:lnSpc>
-              <a:spcBef>
-                <a:spcPts val="500"/>
-              </a:spcBef>
-              <a:buFont typeface="Arial" panose="020B0604020202020204" pitchFamily="34" charset="0"/>
-              <a:buChar char="•"/>
-              <a:defRPr sz="1800" kern="1200">
-                <a:solidFill>
-                  <a:schemeClr val="tx1"/>
-                </a:solidFill>
-                <a:latin typeface="+mn-lt"/>
-                <a:ea typeface="+mn-ea"/>
-                <a:cs typeface="+mn-cs"/>
-              </a:defRPr>
-            </a:lvl6pPr>
-            <a:lvl7pPr marL="2971800" indent="-228600" algn="l" defTabSz="914400" rtl="0" eaLnBrk="1" latinLnBrk="0" hangingPunct="1">
-              <a:lnSpc>
-                <a:spcPct val="90000"/>
-              </a:lnSpc>
-              <a:spcBef>
-                <a:spcPts val="500"/>
-              </a:spcBef>
-              <a:buFont typeface="Arial" panose="020B0604020202020204" pitchFamily="34" charset="0"/>
-              <a:buChar char="•"/>
-              <a:defRPr sz="1800" kern="1200">
-                <a:solidFill>
-                  <a:schemeClr val="tx1"/>
-                </a:solidFill>
-                <a:latin typeface="+mn-lt"/>
-                <a:ea typeface="+mn-ea"/>
-                <a:cs typeface="+mn-cs"/>
-              </a:defRPr>
-            </a:lvl7pPr>
-            <a:lvl8pPr marL="3429000" indent="-228600" algn="l" defTabSz="914400" rtl="0" eaLnBrk="1" latinLnBrk="0" hangingPunct="1">
-              <a:lnSpc>
-                <a:spcPct val="90000"/>
-              </a:lnSpc>
-              <a:spcBef>
-                <a:spcPts val="500"/>
-              </a:spcBef>
-              <a:buFont typeface="Arial" panose="020B0604020202020204" pitchFamily="34" charset="0"/>
-              <a:buChar char="•"/>
-              <a:defRPr sz="1800" kern="1200">
-                <a:solidFill>
-                  <a:schemeClr val="tx1"/>
-                </a:solidFill>
-                <a:latin typeface="+mn-lt"/>
-                <a:ea typeface="+mn-ea"/>
-                <a:cs typeface="+mn-cs"/>
-              </a:defRPr>
-            </a:lvl8pPr>
-            <a:lvl9pPr marL="3886200" indent="-228600" algn="l" defTabSz="914400" rtl="0" eaLnBrk="1" latinLnBrk="0" hangingPunct="1">
-              <a:lnSpc>
-                <a:spcPct val="90000"/>
-              </a:lnSpc>
-              <a:spcBef>
-                <a:spcPts val="500"/>
-              </a:spcBef>
-              <a:buFont typeface="Arial" panose="020B0604020202020204" pitchFamily="34" charset="0"/>
-              <a:buChar char="•"/>
-              <a:defRPr sz="1800" kern="1200">
-                <a:solidFill>
-                  <a:schemeClr val="tx1"/>
-                </a:solidFill>
-                <a:latin typeface="+mn-lt"/>
-                <a:ea typeface="+mn-ea"/>
-                <a:cs typeface="+mn-cs"/>
-              </a:defRPr>
-            </a:lvl9pPr>
-          </a:lstStyle>
-          <a:p>
-            <a:pPr marL="0" indent="0" algn="just">
-              <a:lnSpc>
-                <a:spcPct val="150000"/>
-              </a:lnSpc>
-              <a:buNone/>
-            </a:pPr>
-            <a:r>
-              <a:rPr lang="en-US" sz="2000" dirty="0">
-                <a:latin typeface="Times New Roman" panose="02020603050405020304" pitchFamily="18" charset="0"/>
-                <a:cs typeface="Times New Roman" panose="02020603050405020304" pitchFamily="18" charset="0"/>
-              </a:rPr>
-              <a:t>The graph shows a high BLEU score of 0.82 </a:t>
-            </a:r>
-            <a:r>
-              <a:rPr lang="en-US" sz="2000" dirty="0" smtClean="0">
-                <a:latin typeface="Times New Roman" panose="02020603050405020304" pitchFamily="18" charset="0"/>
-                <a:cs typeface="Times New Roman" panose="02020603050405020304" pitchFamily="18" charset="0"/>
-              </a:rPr>
-              <a:t>which </a:t>
-            </a:r>
-            <a:r>
-              <a:rPr lang="en-US" sz="2000" dirty="0">
-                <a:latin typeface="Times New Roman" panose="02020603050405020304" pitchFamily="18" charset="0"/>
-                <a:cs typeface="Times New Roman" panose="02020603050405020304" pitchFamily="18" charset="0"/>
-              </a:rPr>
-              <a:t>indicates that the model is generating responses very close to human visualization, which is ideal for user trust and utility. </a:t>
-            </a:r>
-            <a:endParaRPr lang="en-US" sz="2000" dirty="0">
-              <a:latin typeface="Times New Roman" panose="02020603050405020304" pitchFamily="18" charset="0"/>
-              <a:cs typeface="Times New Roman" panose="02020603050405020304" pitchFamily="18" charset="0"/>
-            </a:endParaRPr>
-          </a:p>
-        </p:txBody>
-      </p:sp>
-      <p:pic>
-        <p:nvPicPr>
-          <p:cNvPr id="3" name="Picture 2"/>
-          <p:cNvPicPr>
-            <a:picLocks noChangeAspect="1"/>
-          </p:cNvPicPr>
-          <p:nvPr/>
-        </p:nvPicPr>
-        <p:blipFill>
-          <a:blip r:embed="rId2">
-            <a:extLst>
-              <a:ext uri="{28A0092B-C50C-407E-A947-70E740481C1C}">
-                <a14:useLocalDpi xmlns:a14="http://schemas.microsoft.com/office/drawing/2010/main" val="0"/>
-              </a:ext>
-            </a:extLst>
-          </a:blip>
-          <a:stretch>
-            <a:fillRect/>
-          </a:stretch>
-        </p:blipFill>
-        <p:spPr>
-          <a:xfrm>
-            <a:off x="266700" y="1843182"/>
-            <a:ext cx="6414018" cy="4147125"/>
-          </a:xfrm>
-          <a:prstGeom prst="rect">
-            <a:avLst/>
-          </a:prstGeom>
-        </p:spPr>
-      </p:pic>
-    </p:spTree>
-    <p:extLst>
-      <p:ext uri="{BB962C8B-B14F-4D97-AF65-F5344CB8AC3E}">
-        <p14:creationId xmlns:p14="http://schemas.microsoft.com/office/powerpoint/2010/main" val="2294556531"/>
-      </p:ext>
-    </p:extLst>
-  </p:cSld>
-  <p:clrMapOvr>
-    <a:masterClrMapping/>
-  </p:clrMapOvr>
-  <p:timing>
-    <p:tnLst>
-      <p:par>
-        <p:cTn id="1" dur="indefinite" restart="never" nodeType="tmRoot"/>
-      </p:par>
-    </p:tnLst>
-  </p:timing>
-</p:sld>
-</file>
-
-<file path=ppt/slides/slide14.xml><?xml version="1.0" encoding="utf-8"?>
+<file path=ppt/slides/slide15.xml><?xml version="1.0" encoding="utf-8"?>
 <p:sld xmlns:a="http://schemas.openxmlformats.org/drawingml/2006/main" xmlns:r="http://schemas.openxmlformats.org/officeDocument/2006/relationships" xmlns:p="http://schemas.openxmlformats.org/presentationml/2006/main">
   <p:cSld>
     <p:bg>
@@ -21173,8 +21693,8 @@
         </p:blipFill>
         <p:spPr>
           <a:xfrm>
-            <a:off x="1670179" y="1707237"/>
-            <a:ext cx="8698643" cy="3601882"/>
+            <a:off x="6360474" y="2013847"/>
+            <a:ext cx="5202901" cy="3384052"/>
           </a:xfrm>
           <a:prstGeom prst="rect">
             <a:avLst/>
@@ -21215,7 +21735,21 @@
                 <a:latin typeface="Times New Roman" panose="02020603050405020304" pitchFamily="18" charset="0"/>
                 <a:cs typeface="Times New Roman" panose="02020603050405020304" pitchFamily="18" charset="0"/>
               </a:rPr>
-              <a:t>below 0.1 by the 20th epoch</a:t>
+              <a:t>below </a:t>
+            </a:r>
+            <a:r>
+              <a:rPr lang="en-US" sz="2400" dirty="0" smtClean="0">
+                <a:latin typeface="Times New Roman" panose="02020603050405020304" pitchFamily="18" charset="0"/>
+                <a:cs typeface="Times New Roman" panose="02020603050405020304" pitchFamily="18" charset="0"/>
+              </a:rPr>
+              <a:t>0.1 </a:t>
+            </a:r>
+            <a:r>
+              <a:rPr lang="en-US" sz="2400" dirty="0">
+                <a:latin typeface="Times New Roman" panose="02020603050405020304" pitchFamily="18" charset="0"/>
+                <a:cs typeface="Times New Roman" panose="02020603050405020304" pitchFamily="18" charset="0"/>
+              </a:rPr>
+              <a:t>by the 20th epoch</a:t>
             </a:r>
           </a:p>
         </p:txBody>
@@ -21254,14 +21788,35 @@
                 <a:latin typeface="Times New Roman" panose="02020603050405020304" pitchFamily="18" charset="0"/>
                 <a:cs typeface="Times New Roman" panose="02020603050405020304" pitchFamily="18" charset="0"/>
               </a:rPr>
-              <a:t>improving from about 64% to 97</a:t>
+              <a:t>improving from about </a:t>
             </a:r>
             <a:r>
               <a:rPr lang="en-US" sz="2400" dirty="0" smtClean="0">
                 <a:latin typeface="Times New Roman" panose="02020603050405020304" pitchFamily="18" charset="0"/>
                 <a:cs typeface="Times New Roman" panose="02020603050405020304" pitchFamily="18" charset="0"/>
               </a:rPr>
-              <a:t>%</a:t>
+              <a:t>41</a:t>
+            </a:r>
+            <a:r>
+              <a:rPr lang="en-US" sz="2400" dirty="0" smtClean="0">
+                <a:latin typeface="Times New Roman" panose="02020603050405020304" pitchFamily="18" charset="0"/>
+                <a:cs typeface="Times New Roman" panose="02020603050405020304" pitchFamily="18" charset="0"/>
+              </a:rPr>
+              <a:t>% </a:t>
+            </a:r>
+            <a:r>
+              <a:rPr lang="en-US" sz="2400" dirty="0">
+                <a:latin typeface="Times New Roman" panose="02020603050405020304" pitchFamily="18" charset="0"/>
+                <a:cs typeface="Times New Roman" panose="02020603050405020304" pitchFamily="18" charset="0"/>
+              </a:rPr>
+              <a:t>to </a:t>
+            </a:r>
+            <a:r>
+              <a:rPr lang="en-US" sz="2400" dirty="0" smtClean="0">
+                <a:latin typeface="Times New Roman" panose="02020603050405020304" pitchFamily="18" charset="0"/>
+                <a:cs typeface="Times New Roman" panose="02020603050405020304" pitchFamily="18" charset="0"/>
+              </a:rPr>
+              <a:t>94%</a:t>
             </a:r>
             <a:endParaRPr lang="en-US" sz="2400" dirty="0">
               <a:latin typeface="Times New Roman" panose="02020603050405020304" pitchFamily="18" charset="0"/>
@@ -21270,6 +21825,36 @@
           </a:p>
         </p:txBody>
       </p:sp>
+      <p:pic>
+        <p:nvPicPr>
+          <p:cNvPr id="13" name="Picture 12"/>
+          <p:cNvPicPr>
+            <a:picLocks noChangeAspect="1"/>
+          </p:cNvPicPr>
+          <p:nvPr/>
+        </p:nvPicPr>
+        <p:blipFill>
+          <a:blip r:embed="rId3">
+            <a:extLst>
+              <a:ext uri="{28A0092B-C50C-407E-A947-70E740481C1C}">
+                <a14:useLocalDpi xmlns:a14="http://schemas.microsoft.com/office/drawing/2010/main" val="0"/>
+              </a:ext>
+            </a:extLst>
+          </a:blip>
+          <a:stretch>
+            <a:fillRect/>
+          </a:stretch>
+        </p:blipFill>
+        <p:spPr>
+          <a:xfrm>
+            <a:off x="528948" y="1935068"/>
+            <a:ext cx="5202901" cy="3364050"/>
+          </a:xfrm>
+          <a:prstGeom prst="rect">
+            <a:avLst/>
+          </a:prstGeom>
+        </p:spPr>
+      </p:pic>
     </p:spTree>
     <p:extLst>
       <p:ext uri="{BB962C8B-B14F-4D97-AF65-F5344CB8AC3E}">
@@ -21290,7 +21875,7 @@
 </p:sld>
 </file>
 
-<file path=ppt/slides/slide15.xml><?xml version="1.0" encoding="utf-8"?>
+<file path=ppt/slides/slide16.xml><?xml version="1.0" encoding="utf-8"?>
 <p:sld xmlns:a="http://schemas.openxmlformats.org/drawingml/2006/main" xmlns:r="http://schemas.openxmlformats.org/officeDocument/2006/relationships" xmlns:p="http://schemas.openxmlformats.org/presentationml/2006/main">
   <p:cSld>
     <p:bg>
@@ -21694,8 +22279,8 @@
         </p:blipFill>
         <p:spPr>
           <a:xfrm>
-            <a:off x="367463" y="1632541"/>
-            <a:ext cx="5090945" cy="3257014"/>
+            <a:off x="402320" y="1632541"/>
+            <a:ext cx="5021230" cy="3257014"/>
           </a:xfrm>
           <a:prstGeom prst="rect">
             <a:avLst/>
@@ -21741,6 +22326,71 @@
         <p:spPr>
           <a:xfrm>
             <a:off x="273698" y="5079987"/>
+            <a:ext cx="5822302" cy="1569660"/>
+          </a:xfrm>
+          <a:prstGeom prst="rect">
+            <a:avLst/>
+          </a:prstGeom>
+          <a:noFill/>
+        </p:spPr>
+        <p:txBody>
+          <a:bodyPr wrap="square" rtlCol="0">
+            <a:spAutoFit/>
+          </a:bodyPr>
+          <a:lstStyle/>
+          <a:p>
+            <a:pPr algn="just"/>
+            <a:r>
+              <a:rPr lang="en-US" sz="2400" dirty="0" smtClean="0">
+                <a:latin typeface="Times New Roman" panose="02020603050405020304" pitchFamily="18" charset="0"/>
+                <a:cs typeface="Times New Roman" panose="02020603050405020304" pitchFamily="18" charset="0"/>
+              </a:rPr>
+              <a:t>The </a:t>
+            </a:r>
+            <a:r>
+              <a:rPr lang="en-US" sz="2400" dirty="0">
+                <a:latin typeface="Times New Roman" panose="02020603050405020304" pitchFamily="18" charset="0"/>
+                <a:cs typeface="Times New Roman" panose="02020603050405020304" pitchFamily="18" charset="0"/>
+              </a:rPr>
+              <a:t>threshold crosses 5</a:t>
+            </a:r>
+            <a:r>
+              <a:rPr lang="en-US" sz="2400" dirty="0" smtClean="0">
+                <a:latin typeface="Times New Roman" panose="02020603050405020304" pitchFamily="18" charset="0"/>
+                <a:cs typeface="Times New Roman" panose="02020603050405020304" pitchFamily="18" charset="0"/>
+              </a:rPr>
+              <a:t>0 so the predictions </a:t>
+            </a:r>
+            <a:r>
+              <a:rPr lang="en-US" sz="2400" dirty="0">
+                <a:latin typeface="Times New Roman" panose="02020603050405020304" pitchFamily="18" charset="0"/>
+                <a:cs typeface="Times New Roman" panose="02020603050405020304" pitchFamily="18" charset="0"/>
+              </a:rPr>
+              <a:t>are nearly all correct. This indicates that higher confidence scores correspond to more correct </a:t>
+            </a:r>
+            <a:r>
+              <a:rPr lang="en-US" sz="2400" dirty="0" smtClean="0">
+                <a:latin typeface="Times New Roman" panose="02020603050405020304" pitchFamily="18" charset="0"/>
+                <a:cs typeface="Times New Roman" panose="02020603050405020304" pitchFamily="18" charset="0"/>
+              </a:rPr>
+              <a:t>predictions.</a:t>
+            </a:r>
+            <a:endParaRPr lang="en-US" sz="2400" dirty="0">
+              <a:latin typeface="Times New Roman" panose="02020603050405020304" pitchFamily="18" charset="0"/>
+              <a:cs typeface="Times New Roman" panose="02020603050405020304" pitchFamily="18" charset="0"/>
+            </a:endParaRPr>
+          </a:p>
+        </p:txBody>
+      </p:sp>
+      <p:sp>
+        <p:nvSpPr>
+          <p:cNvPr id="15" name="TextBox 14"/>
+          <p:cNvSpPr txBox="1"/>
+          <p:nvPr/>
+        </p:nvSpPr>
+        <p:spPr>
+          <a:xfrm>
+            <a:off x="6284643" y="5088947"/>
             <a:ext cx="5822302" cy="1200329"/>
           </a:xfrm>
           <a:prstGeom prst="rect">
@@ -21760,75 +22410,7 @@
                 <a:latin typeface="Times New Roman" panose="02020603050405020304" pitchFamily="18" charset="0"/>
                 <a:cs typeface="Times New Roman" panose="02020603050405020304" pitchFamily="18" charset="0"/>
               </a:rPr>
-              <a:t>As the confidence threshold increases, precision also increases, starting around 0.93 and reaching nearly 1.0</a:t>
-            </a:r>
-          </a:p>
-        </p:txBody>
-      </p:sp>
-      <p:sp>
-        <p:nvSpPr>
-          <p:cNvPr id="15" name="TextBox 14"/>
-          <p:cNvSpPr txBox="1"/>
-          <p:nvPr/>
-        </p:nvSpPr>
-        <p:spPr>
-          <a:xfrm>
-            <a:off x="6284643" y="5088947"/>
-            <a:ext cx="5822302" cy="1569660"/>
-          </a:xfrm>
-          <a:prstGeom prst="rect">
-            <a:avLst/>
-          </a:prstGeom>
-          <a:noFill/>
-        </p:spPr>
-        <p:txBody>
-          <a:bodyPr wrap="square" rtlCol="0">
-            <a:spAutoFit/>
-          </a:bodyPr>
-          <a:lstStyle/>
-          <a:p>
-            <a:pPr algn="just"/>
-            <a:r>
-              <a:rPr lang="en-US" sz="2400" dirty="0">
-                <a:latin typeface="Times New Roman" panose="02020603050405020304" pitchFamily="18" charset="0"/>
-                <a:cs typeface="Times New Roman" panose="02020603050405020304" pitchFamily="18" charset="0"/>
-              </a:rPr>
-              <a:t>Recall remains high </a:t>
-            </a:r>
-            <a:r>
-              <a:rPr lang="en-US" sz="2400" dirty="0" smtClean="0">
-                <a:latin typeface="Times New Roman" panose="02020603050405020304" pitchFamily="18" charset="0"/>
-                <a:cs typeface="Times New Roman" panose="02020603050405020304" pitchFamily="18" charset="0"/>
-              </a:rPr>
-              <a:t>for </a:t>
-            </a:r>
-            <a:r>
-              <a:rPr lang="en-US" sz="2400" dirty="0">
-                <a:latin typeface="Times New Roman" panose="02020603050405020304" pitchFamily="18" charset="0"/>
-                <a:cs typeface="Times New Roman" panose="02020603050405020304" pitchFamily="18" charset="0"/>
-              </a:rPr>
-              <a:t>low </a:t>
-            </a:r>
-            <a:r>
-              <a:rPr lang="en-US" sz="2400" dirty="0" smtClean="0">
-                <a:latin typeface="Times New Roman" panose="02020603050405020304" pitchFamily="18" charset="0"/>
-                <a:cs typeface="Times New Roman" panose="02020603050405020304" pitchFamily="18" charset="0"/>
-              </a:rPr>
-              <a:t>thresholds. But, </a:t>
-            </a:r>
-            <a:r>
-              <a:rPr lang="en-US" sz="2400" dirty="0">
-                <a:latin typeface="Times New Roman" panose="02020603050405020304" pitchFamily="18" charset="0"/>
-                <a:cs typeface="Times New Roman" panose="02020603050405020304" pitchFamily="18" charset="0"/>
-              </a:rPr>
-              <a:t>as the threshold increases, recall gradually declines and drops sharply near a threshold of </a:t>
-            </a:r>
-            <a:r>
-              <a:rPr lang="en-US" sz="2400" dirty="0" smtClean="0">
-                <a:latin typeface="Times New Roman" panose="02020603050405020304" pitchFamily="18" charset="0"/>
-                <a:cs typeface="Times New Roman" panose="02020603050405020304" pitchFamily="18" charset="0"/>
-              </a:rPr>
-              <a:t>1.0</a:t>
+              <a:t>The precision-recall curve visualizes that the model captures a high number of true positives (high recall).</a:t>
             </a:r>
             <a:endParaRPr lang="en-US" sz="3200" dirty="0">
               <a:latin typeface="Times New Roman" panose="02020603050405020304" pitchFamily="18" charset="0"/>
@@ -21857,7 +22439,7 @@
 </p:sld>
 </file>
 
-<file path=ppt/slides/slide16.xml><?xml version="1.0" encoding="utf-8"?>
+<file path=ppt/slides/slide17.xml><?xml version="1.0" encoding="utf-8"?>
 <p:sld xmlns:a="http://schemas.openxmlformats.org/drawingml/2006/main" xmlns:r="http://schemas.openxmlformats.org/officeDocument/2006/relationships" xmlns:p="http://schemas.openxmlformats.org/presentationml/2006/main">
   <p:cSld>
     <p:spTree>
@@ -22133,14 +22715,62 @@
                 <a:latin typeface="Times New Roman" panose="02020603050405020304" pitchFamily="18" charset="0"/>
                 <a:cs typeface="Times New Roman" panose="02020603050405020304" pitchFamily="18" charset="0"/>
               </a:rPr>
-              <a:t>has high accuracy overall, with most herbs correctly predicted. Misclassifications are minimal and mostly between visually similar plants, </a:t>
+              <a:t>has high accuracy overall, with most herbs correctly predicted. </a:t>
+            </a:r>
+            <a:r>
+              <a:rPr lang="en-US" sz="2000">
+                <a:latin typeface="Times New Roman" panose="02020603050405020304" pitchFamily="18" charset="0"/>
+                <a:cs typeface="Times New Roman" panose="02020603050405020304" pitchFamily="18" charset="0"/>
+              </a:rPr>
+              <a:t>Misclassifications </a:t>
+            </a:r>
+            <a:r>
+              <a:rPr lang="en-US" sz="2000" smtClean="0">
+                <a:latin typeface="Times New Roman" panose="02020603050405020304" pitchFamily="18" charset="0"/>
+                <a:cs typeface="Times New Roman" panose="02020603050405020304" pitchFamily="18" charset="0"/>
+              </a:rPr>
+              <a:t>were </a:t>
+            </a:r>
+            <a:r>
+              <a:rPr lang="en-US" sz="2000" dirty="0">
+                <a:latin typeface="Times New Roman" panose="02020603050405020304" pitchFamily="18" charset="0"/>
+                <a:cs typeface="Times New Roman" panose="02020603050405020304" pitchFamily="18" charset="0"/>
+              </a:rPr>
+              <a:t>minimal and mostly between visually similar </a:t>
             </a:r>
             <a:r>
               <a:rPr lang="en-US" sz="2000" dirty="0" smtClean="0">
                 <a:latin typeface="Times New Roman" panose="02020603050405020304" pitchFamily="18" charset="0"/>
                 <a:cs typeface="Times New Roman" panose="02020603050405020304" pitchFamily="18" charset="0"/>
               </a:rPr>
-              <a:t>which we did best to improve </a:t>
+              <a:t>plants.</a:t>
+            </a:r>
+          </a:p>
+          <a:p>
+            <a:pPr marL="0" indent="0" algn="just">
+              <a:lnSpc>
+                <a:spcPct val="150000"/>
+              </a:lnSpc>
+              <a:buNone/>
+            </a:pPr>
+            <a:endParaRPr lang="en-US" sz="2000" dirty="0" smtClean="0">
+              <a:latin typeface="Times New Roman" panose="02020603050405020304" pitchFamily="18" charset="0"/>
+              <a:cs typeface="Times New Roman" panose="02020603050405020304" pitchFamily="18" charset="0"/>
+            </a:endParaRPr>
+          </a:p>
+          <a:p>
+            <a:pPr marL="0" indent="0" algn="just">
+              <a:lnSpc>
+                <a:spcPct val="150000"/>
+              </a:lnSpc>
+              <a:buNone/>
+            </a:pPr>
+            <a:r>
+              <a:rPr lang="en-US" sz="2000" dirty="0" smtClean="0">
+                <a:latin typeface="Times New Roman" panose="02020603050405020304" pitchFamily="18" charset="0"/>
+                <a:cs typeface="Times New Roman" panose="02020603050405020304" pitchFamily="18" charset="0"/>
+              </a:rPr>
+              <a:t>We did best to improve </a:t>
             </a:r>
             <a:r>
               <a:rPr lang="en-US" sz="2000" dirty="0">
@@ -22202,7 +22832,271 @@
 </p:sld>
 </file>
 
-<file path=ppt/slides/slide17.xml><?xml version="1.0" encoding="utf-8"?>
+<file path=ppt/slides/slide18.xml><?xml version="1.0" encoding="utf-8"?>
+<p:sld xmlns:a="http://schemas.openxmlformats.org/drawingml/2006/main" xmlns:r="http://schemas.openxmlformats.org/officeDocument/2006/relationships" xmlns:p="http://schemas.openxmlformats.org/presentationml/2006/main">
+  <p:cSld>
+    <p:spTree>
+      <p:nvGrpSpPr>
+        <p:cNvPr id="1" name="">
+          <a:extLst>
+            <a:ext uri="{FF2B5EF4-FFF2-40B4-BE49-F238E27FC236}">
+              <a16:creationId xmlns:a16="http://schemas.microsoft.com/office/drawing/2014/main" id="{594A379E-9909-AA69-EF88-EDF3556FA848}"/>
+            </a:ext>
+          </a:extLst>
+        </p:cNvPr>
+        <p:cNvGrpSpPr/>
+        <p:nvPr/>
+      </p:nvGrpSpPr>
+      <p:grpSpPr>
+        <a:xfrm>
+          <a:off x="0" y="0"/>
+          <a:ext cx="0" cy="0"/>
+          <a:chOff x="0" y="0"/>
+          <a:chExt cx="0" cy="0"/>
+        </a:xfrm>
+      </p:grpSpPr>
+      <p:sp>
+        <p:nvSpPr>
+          <p:cNvPr id="2" name="Title 1">
+            <a:extLst>
+              <a:ext uri="{FF2B5EF4-FFF2-40B4-BE49-F238E27FC236}">
+                <a16:creationId xmlns:a16="http://schemas.microsoft.com/office/drawing/2014/main" id="{E8282EE8-921E-B213-5D20-94242BEF75E7}"/>
+              </a:ext>
+            </a:extLst>
+          </p:cNvPr>
+          <p:cNvSpPr>
+            <a:spLocks noGrp="1"/>
+          </p:cNvSpPr>
+          <p:nvPr>
+            <p:ph type="title"/>
+          </p:nvPr>
+        </p:nvSpPr>
+        <p:spPr>
+          <a:xfrm>
+            <a:off x="391887" y="195943"/>
+            <a:ext cx="11023734" cy="1030651"/>
+          </a:xfrm>
+        </p:spPr>
+        <p:txBody>
+          <a:bodyPr anchor="ctr">
+            <a:normAutofit/>
+          </a:bodyPr>
+          <a:lstStyle/>
+          <a:p>
+            <a:pPr algn="ctr"/>
+            <a:r>
+              <a:rPr lang="en-GB" sz="4000" dirty="0" smtClean="0">
+                <a:latin typeface="Times New Roman" panose="02020603050405020304" pitchFamily="18" charset="0"/>
+                <a:cs typeface="Times New Roman" panose="02020603050405020304" pitchFamily="18" charset="0"/>
+              </a:rPr>
+              <a:t>Result &amp; Discussion</a:t>
+            </a:r>
+            <a:endParaRPr lang="en-US" sz="4000" dirty="0">
+              <a:latin typeface="Times New Roman" panose="02020603050405020304" pitchFamily="18" charset="0"/>
+              <a:cs typeface="Times New Roman" panose="02020603050405020304" pitchFamily="18" charset="0"/>
+            </a:endParaRPr>
+          </a:p>
+        </p:txBody>
+      </p:sp>
+      <p:pic>
+        <p:nvPicPr>
+          <p:cNvPr id="3" name="Picture 2"/>
+          <p:cNvPicPr>
+            <a:picLocks noChangeAspect="1"/>
+          </p:cNvPicPr>
+          <p:nvPr/>
+        </p:nvPicPr>
+        <p:blipFill rotWithShape="1">
+          <a:blip r:embed="rId2" cstate="hqprint">
+            <a:extLst>
+              <a:ext uri="{28A0092B-C50C-407E-A947-70E740481C1C}">
+                <a14:useLocalDpi xmlns:a14="http://schemas.microsoft.com/office/drawing/2010/main" val="0"/>
+              </a:ext>
+            </a:extLst>
+          </a:blip>
+          <a:srcRect l="7678" t="11141" r="8157" b="5380"/>
+          <a:stretch/>
+        </p:blipFill>
+        <p:spPr>
+          <a:xfrm>
+            <a:off x="205273" y="2108719"/>
+            <a:ext cx="5318449" cy="2952090"/>
+          </a:xfrm>
+          <a:prstGeom prst="rect">
+            <a:avLst/>
+          </a:prstGeom>
+        </p:spPr>
+      </p:pic>
+      <p:pic>
+        <p:nvPicPr>
+          <p:cNvPr id="5" name="Picture 4"/>
+          <p:cNvPicPr>
+            <a:picLocks noChangeAspect="1"/>
+          </p:cNvPicPr>
+          <p:nvPr/>
+        </p:nvPicPr>
+        <p:blipFill rotWithShape="1">
+          <a:blip r:embed="rId3" cstate="print">
+            <a:extLst>
+              <a:ext uri="{28A0092B-C50C-407E-A947-70E740481C1C}">
+                <a14:useLocalDpi xmlns:a14="http://schemas.microsoft.com/office/drawing/2010/main" val="0"/>
+              </a:ext>
+            </a:extLst>
+          </a:blip>
+          <a:srcRect l="8887" t="11583" r="6996" b="13797"/>
+          <a:stretch/>
+        </p:blipFill>
+        <p:spPr>
+          <a:xfrm>
+            <a:off x="5760099" y="2054543"/>
+            <a:ext cx="6133321" cy="3060441"/>
+          </a:xfrm>
+          <a:prstGeom prst="rect">
+            <a:avLst/>
+          </a:prstGeom>
+        </p:spPr>
+      </p:pic>
+      <p:sp>
+        <p:nvSpPr>
+          <p:cNvPr id="6" name="Title 1">
+            <a:extLst>
+              <a:ext uri="{FF2B5EF4-FFF2-40B4-BE49-F238E27FC236}">
+                <a16:creationId xmlns:a16="http://schemas.microsoft.com/office/drawing/2014/main" id="{E8282EE8-921E-B213-5D20-94242BEF75E7}"/>
+              </a:ext>
+            </a:extLst>
+          </p:cNvPr>
+          <p:cNvSpPr txBox="1">
+            <a:spLocks/>
+          </p:cNvSpPr>
+          <p:nvPr/>
+        </p:nvSpPr>
+        <p:spPr>
+          <a:xfrm>
+            <a:off x="133740" y="5527888"/>
+            <a:ext cx="5473958" cy="830091"/>
+          </a:xfrm>
+          <a:prstGeom prst="rect">
+            <a:avLst/>
+          </a:prstGeom>
+        </p:spPr>
+        <p:txBody>
+          <a:bodyPr vert="horz" lIns="91440" tIns="45720" rIns="91440" bIns="45720" rtlCol="0" anchor="ctr">
+            <a:normAutofit/>
+          </a:bodyPr>
+          <a:lstStyle>
+            <a:lvl1pPr algn="l" defTabSz="914400" rtl="0" eaLnBrk="1" latinLnBrk="0" hangingPunct="1">
+              <a:lnSpc>
+                <a:spcPct val="90000"/>
+              </a:lnSpc>
+              <a:spcBef>
+                <a:spcPct val="0"/>
+              </a:spcBef>
+              <a:buNone/>
+              <a:defRPr sz="4400" kern="1200">
+                <a:solidFill>
+                  <a:schemeClr val="tx1"/>
+                </a:solidFill>
+                <a:latin typeface="+mj-lt"/>
+                <a:ea typeface="+mj-ea"/>
+                <a:cs typeface="+mj-cs"/>
+              </a:defRPr>
+            </a:lvl1pPr>
+          </a:lstStyle>
+          <a:p>
+            <a:pPr algn="ctr"/>
+            <a:r>
+              <a:rPr lang="en-GB" sz="4000" dirty="0" smtClean="0">
+                <a:latin typeface="Times New Roman" panose="02020603050405020304" pitchFamily="18" charset="0"/>
+                <a:cs typeface="Times New Roman" panose="02020603050405020304" pitchFamily="18" charset="0"/>
+              </a:rPr>
+              <a:t>Input</a:t>
+            </a:r>
+            <a:endParaRPr lang="en-US" sz="4000" dirty="0">
+              <a:latin typeface="Times New Roman" panose="02020603050405020304" pitchFamily="18" charset="0"/>
+              <a:cs typeface="Times New Roman" panose="02020603050405020304" pitchFamily="18" charset="0"/>
+            </a:endParaRPr>
+          </a:p>
+        </p:txBody>
+      </p:sp>
+      <p:sp>
+        <p:nvSpPr>
+          <p:cNvPr id="7" name="Title 1">
+            <a:extLst>
+              <a:ext uri="{FF2B5EF4-FFF2-40B4-BE49-F238E27FC236}">
+                <a16:creationId xmlns:a16="http://schemas.microsoft.com/office/drawing/2014/main" id="{E8282EE8-921E-B213-5D20-94242BEF75E7}"/>
+              </a:ext>
+            </a:extLst>
+          </p:cNvPr>
+          <p:cNvSpPr txBox="1">
+            <a:spLocks/>
+          </p:cNvSpPr>
+          <p:nvPr/>
+        </p:nvSpPr>
+        <p:spPr>
+          <a:xfrm>
+            <a:off x="5688564" y="5527888"/>
+            <a:ext cx="5473958" cy="830091"/>
+          </a:xfrm>
+          <a:prstGeom prst="rect">
+            <a:avLst/>
+          </a:prstGeom>
+        </p:spPr>
+        <p:txBody>
+          <a:bodyPr vert="horz" lIns="91440" tIns="45720" rIns="91440" bIns="45720" rtlCol="0" anchor="ctr">
+            <a:normAutofit/>
+          </a:bodyPr>
+          <a:lstStyle>
+            <a:lvl1pPr algn="l" defTabSz="914400" rtl="0" eaLnBrk="1" latinLnBrk="0" hangingPunct="1">
+              <a:lnSpc>
+                <a:spcPct val="90000"/>
+              </a:lnSpc>
+              <a:spcBef>
+                <a:spcPct val="0"/>
+              </a:spcBef>
+              <a:buNone/>
+              <a:defRPr sz="4400" kern="1200">
+                <a:solidFill>
+                  <a:schemeClr val="tx1"/>
+                </a:solidFill>
+                <a:latin typeface="+mj-lt"/>
+                <a:ea typeface="+mj-ea"/>
+                <a:cs typeface="+mj-cs"/>
+              </a:defRPr>
+            </a:lvl1pPr>
+          </a:lstStyle>
+          <a:p>
+            <a:pPr algn="ctr"/>
+            <a:r>
+              <a:rPr lang="en-GB" sz="4000" dirty="0" smtClean="0">
+                <a:latin typeface="Times New Roman" panose="02020603050405020304" pitchFamily="18" charset="0"/>
+                <a:cs typeface="Times New Roman" panose="02020603050405020304" pitchFamily="18" charset="0"/>
+              </a:rPr>
+              <a:t>Output</a:t>
+            </a:r>
+          </a:p>
+        </p:txBody>
+      </p:sp>
+    </p:spTree>
+    <p:extLst>
+      <p:ext uri="{BB962C8B-B14F-4D97-AF65-F5344CB8AC3E}">
+        <p14:creationId xmlns:p14="http://schemas.microsoft.com/office/powerpoint/2010/main" val="4291013252"/>
+      </p:ext>
+    </p:extLst>
+  </p:cSld>
+  <p:clrMapOvr>
+    <a:masterClrMapping/>
+  </p:clrMapOvr>
+  <p:timing>
+    <p:tnLst>
+      <p:par>
+        <p:cTn id="1" dur="indefinite" restart="never" nodeType="tmRoot"/>
+      </p:par>
+    </p:tnLst>
+  </p:timing>
+</p:sld>
+</file>
+
+<file path=ppt/slides/slide19.xml><?xml version="1.0" encoding="utf-8"?>
 <p:sld xmlns:a="http://schemas.openxmlformats.org/drawingml/2006/main" xmlns:r="http://schemas.openxmlformats.org/officeDocument/2006/relationships" xmlns:p="http://schemas.openxmlformats.org/presentationml/2006/main">
   <p:cSld>
     <p:bg>
@@ -22571,7 +23465,17 @@
                 <a:latin typeface="Times New Roman" panose="02020603050405020304" pitchFamily="18" charset="0"/>
                 <a:cs typeface="Times New Roman" panose="02020603050405020304" pitchFamily="18" charset="0"/>
               </a:rPr>
-              <a:t>CHALLENGES &amp; Solutions</a:t>
+              <a:t>CHALLENGES &amp; </a:t>
+            </a:r>
+            <a:r>
+              <a:rPr lang="en-GB" sz="4000" dirty="0" smtClean="0">
+                <a:solidFill>
+                  <a:srgbClr val="FFFFFF"/>
+                </a:solidFill>
+                <a:latin typeface="Times New Roman" panose="02020603050405020304" pitchFamily="18" charset="0"/>
+                <a:cs typeface="Times New Roman" panose="02020603050405020304" pitchFamily="18" charset="0"/>
+              </a:rPr>
+              <a:t>SOLUTIONS</a:t>
             </a:r>
             <a:endParaRPr lang="en-US" sz="4000" dirty="0">
               <a:solidFill>
@@ -22931,798 +23835,6 @@
       </p:par>
     </p:tnLst>
   </p:timing>
-</p:sld>
-</file>
-
-<file path=ppt/slides/slide18.xml><?xml version="1.0" encoding="utf-8"?>
-<p:sld xmlns:a="http://schemas.openxmlformats.org/drawingml/2006/main" xmlns:r="http://schemas.openxmlformats.org/officeDocument/2006/relationships" xmlns:p="http://schemas.openxmlformats.org/presentationml/2006/main">
-  <p:cSld>
-    <p:bg>
-      <p:bgPr>
-        <a:solidFill>
-          <a:schemeClr val="bg1"/>
-        </a:solidFill>
-        <a:effectLst/>
-      </p:bgPr>
-    </p:bg>
-    <p:spTree>
-      <p:nvGrpSpPr>
-        <p:cNvPr id="1" name=""/>
-        <p:cNvGrpSpPr/>
-        <p:nvPr/>
-      </p:nvGrpSpPr>
-      <p:grpSpPr>
-        <a:xfrm>
-          <a:off x="0" y="0"/>
-          <a:ext cx="0" cy="0"/>
-          <a:chOff x="0" y="0"/>
-          <a:chExt cx="0" cy="0"/>
-        </a:xfrm>
-      </p:grpSpPr>
-      <p:sp useBgFill="1">
-        <p:nvSpPr>
-          <p:cNvPr id="10" name="Rectangle 9">
-            <a:extLst>
-              <a:ext uri="{FF2B5EF4-FFF2-40B4-BE49-F238E27FC236}">
-                <a16:creationId xmlns:a16="http://schemas.microsoft.com/office/drawing/2014/main" id="{BACC6370-2D7E-4714-9D71-7542949D7D5D}"/>
-              </a:ext>
-              <a:ext uri="{C183D7F6-B498-43B3-948B-1728B52AA6E4}">
-                <adec:decorative xmlns:adec="http://schemas.microsoft.com/office/drawing/2017/decorative" xmlns="" val="1"/>
-              </a:ext>
-            </a:extLst>
-          </p:cNvPr>
-          <p:cNvSpPr>
-            <a:spLocks noGrp="1" noRot="1" noChangeAspect="1" noMove="1" noResize="1" noEditPoints="1" noAdjustHandles="1" noChangeArrowheads="1" noChangeShapeType="1" noTextEdit="1"/>
-          </p:cNvSpPr>
-          <p:nvPr>
-            <p:extLst>
-              <p:ext uri="{386F3935-93C4-4BCD-93E2-E3B085C9AB24}">
-                <p16:designElem xmlns:p16="http://schemas.microsoft.com/office/powerpoint/2015/main" val="1"/>
-              </p:ext>
-            </p:extLst>
-          </p:nvPr>
-        </p:nvSpPr>
-        <p:spPr>
-          <a:xfrm>
-            <a:off x="0" y="0"/>
-            <a:ext cx="12192000" cy="6858000"/>
-          </a:xfrm>
-          <a:prstGeom prst="rect">
-            <a:avLst/>
-          </a:prstGeom>
-          <a:ln w="12700" cap="flat" cmpd="sng" algn="ctr">
-            <a:noFill/>
-            <a:prstDash val="solid"/>
-            <a:miter lim="800000"/>
-          </a:ln>
-          <a:effectLst/>
-          <a:extLst>
-            <a:ext uri="{91240B29-F687-4F45-9708-019B960494DF}">
-              <a14:hiddenLine xmlns:a14="http://schemas.microsoft.com/office/drawing/2010/main" w="12700" cap="flat" cmpd="sng" algn="ctr">
-                <a:solidFill>
-                  <a:schemeClr val="accent1">
-                    <a:shade val="50000"/>
-                  </a:schemeClr>
-                </a:solidFill>
-                <a:prstDash val="solid"/>
-                <a:miter lim="800000"/>
-              </a14:hiddenLine>
-            </a:ext>
-          </a:extLst>
-        </p:spPr>
-        <p:style>
-          <a:lnRef idx="2">
-            <a:schemeClr val="accent1">
-              <a:shade val="50000"/>
-            </a:schemeClr>
-          </a:lnRef>
-          <a:fillRef idx="1">
-            <a:schemeClr val="accent1"/>
-          </a:fillRef>
-          <a:effectRef idx="0">
-            <a:schemeClr val="accent1"/>
-          </a:effectRef>
-          <a:fontRef idx="minor">
-            <a:schemeClr val="lt1"/>
-          </a:fontRef>
-        </p:style>
-        <p:txBody>
-          <a:bodyPr rtlCol="0" anchor="ctr"/>
-          <a:lstStyle/>
-          <a:p>
-            <a:pPr algn="ctr"/>
-            <a:endParaRPr lang="en-US"/>
-          </a:p>
-        </p:txBody>
-      </p:sp>
-      <p:sp>
-        <p:nvSpPr>
-          <p:cNvPr id="12" name="Rectangle 11">
-            <a:extLst>
-              <a:ext uri="{FF2B5EF4-FFF2-40B4-BE49-F238E27FC236}">
-                <a16:creationId xmlns:a16="http://schemas.microsoft.com/office/drawing/2014/main" id="{F68B3F68-107C-434F-AA38-110D5EA91B85}"/>
-              </a:ext>
-              <a:ext uri="{C183D7F6-B498-43B3-948B-1728B52AA6E4}">
-                <adec:decorative xmlns:adec="http://schemas.microsoft.com/office/drawing/2017/decorative" xmlns="" val="1"/>
-              </a:ext>
-            </a:extLst>
-          </p:cNvPr>
-          <p:cNvSpPr>
-            <a:spLocks noGrp="1" noRot="1" noChangeAspect="1" noMove="1" noResize="1" noEditPoints="1" noAdjustHandles="1" noChangeArrowheads="1" noChangeShapeType="1" noTextEdit="1"/>
-          </p:cNvSpPr>
-          <p:nvPr>
-            <p:extLst>
-              <p:ext uri="{386F3935-93C4-4BCD-93E2-E3B085C9AB24}">
-                <p16:designElem xmlns:p16="http://schemas.microsoft.com/office/powerpoint/2015/main" val="1"/>
-              </p:ext>
-            </p:extLst>
-          </p:nvPr>
-        </p:nvSpPr>
-        <p:spPr>
-          <a:xfrm flipH="1">
-            <a:off x="2" y="0"/>
-            <a:ext cx="12191998" cy="1575955"/>
-          </a:xfrm>
-          <a:prstGeom prst="rect">
-            <a:avLst/>
-          </a:prstGeom>
-          <a:gradFill>
-            <a:gsLst>
-              <a:gs pos="0">
-                <a:srgbClr val="000000">
-                  <a:alpha val="96000"/>
-                </a:srgbClr>
-              </a:gs>
-              <a:gs pos="100000">
-                <a:schemeClr val="accent1">
-                  <a:lumMod val="75000"/>
-                </a:schemeClr>
-              </a:gs>
-            </a:gsLst>
-            <a:lin ang="8400000" scaled="0"/>
-          </a:gradFill>
-          <a:ln>
-            <a:noFill/>
-          </a:ln>
-        </p:spPr>
-        <p:style>
-          <a:lnRef idx="2">
-            <a:schemeClr val="accent1">
-              <a:shade val="50000"/>
-            </a:schemeClr>
-          </a:lnRef>
-          <a:fillRef idx="1">
-            <a:schemeClr val="accent1"/>
-          </a:fillRef>
-          <a:effectRef idx="0">
-            <a:schemeClr val="accent1"/>
-          </a:effectRef>
-          <a:fontRef idx="minor">
-            <a:schemeClr val="lt1"/>
-          </a:fontRef>
-        </p:style>
-        <p:txBody>
-          <a:bodyPr rtlCol="0" anchor="ctr"/>
-          <a:lstStyle/>
-          <a:p>
-            <a:pPr algn="ctr"/>
-            <a:endParaRPr lang="en-US"/>
-          </a:p>
-        </p:txBody>
-      </p:sp>
-      <p:sp>
-        <p:nvSpPr>
-          <p:cNvPr id="14" name="Rectangle 13">
-            <a:extLst>
-              <a:ext uri="{FF2B5EF4-FFF2-40B4-BE49-F238E27FC236}">
-                <a16:creationId xmlns:a16="http://schemas.microsoft.com/office/drawing/2014/main" id="{AAD0DBB9-1A4B-4391-81D4-CB19F9AB918A}"/>
-              </a:ext>
-              <a:ext uri="{C183D7F6-B498-43B3-948B-1728B52AA6E4}">
-                <adec:decorative xmlns:adec="http://schemas.microsoft.com/office/drawing/2017/decorative" xmlns="" val="1"/>
-              </a:ext>
-            </a:extLst>
-          </p:cNvPr>
-          <p:cNvSpPr>
-            <a:spLocks noGrp="1" noRot="1" noChangeAspect="1" noMove="1" noResize="1" noEditPoints="1" noAdjustHandles="1" noChangeArrowheads="1" noChangeShapeType="1" noTextEdit="1"/>
-          </p:cNvSpPr>
-          <p:nvPr>
-            <p:extLst>
-              <p:ext uri="{386F3935-93C4-4BCD-93E2-E3B085C9AB24}">
-                <p16:designElem xmlns:p16="http://schemas.microsoft.com/office/powerpoint/2015/main" val="1"/>
-              </p:ext>
-            </p:extLst>
-          </p:nvPr>
-        </p:nvSpPr>
-        <p:spPr>
-          <a:xfrm rot="10800000" flipH="1">
-            <a:off x="8128857" y="0"/>
-            <a:ext cx="4063143" cy="1576412"/>
-          </a:xfrm>
-          <a:prstGeom prst="rect">
-            <a:avLst/>
-          </a:prstGeom>
-          <a:gradFill>
-            <a:gsLst>
-              <a:gs pos="19000">
-                <a:schemeClr val="accent1">
-                  <a:lumMod val="50000"/>
-                  <a:alpha val="68000"/>
-                </a:schemeClr>
-              </a:gs>
-              <a:gs pos="100000">
-                <a:schemeClr val="accent1">
-                  <a:alpha val="79000"/>
-                </a:schemeClr>
-              </a:gs>
-            </a:gsLst>
-            <a:lin ang="19200000" scaled="0"/>
-          </a:gradFill>
-          <a:ln>
-            <a:noFill/>
-          </a:ln>
-        </p:spPr>
-        <p:style>
-          <a:lnRef idx="2">
-            <a:schemeClr val="accent1">
-              <a:shade val="50000"/>
-            </a:schemeClr>
-          </a:lnRef>
-          <a:fillRef idx="1">
-            <a:schemeClr val="accent1"/>
-          </a:fillRef>
-          <a:effectRef idx="0">
-            <a:schemeClr val="accent1"/>
-          </a:effectRef>
-          <a:fontRef idx="minor">
-            <a:schemeClr val="lt1"/>
-          </a:fontRef>
-        </p:style>
-        <p:txBody>
-          <a:bodyPr rtlCol="0" anchor="ctr"/>
-          <a:lstStyle/>
-          <a:p>
-            <a:pPr algn="ctr"/>
-            <a:endParaRPr lang="en-US"/>
-          </a:p>
-        </p:txBody>
-      </p:sp>
-      <p:sp>
-        <p:nvSpPr>
-          <p:cNvPr id="16" name="Rectangle 15">
-            <a:extLst>
-              <a:ext uri="{FF2B5EF4-FFF2-40B4-BE49-F238E27FC236}">
-                <a16:creationId xmlns:a16="http://schemas.microsoft.com/office/drawing/2014/main" id="{063BBA22-50EA-4C4D-BE05-F1CE4E63AA56}"/>
-              </a:ext>
-              <a:ext uri="{C183D7F6-B498-43B3-948B-1728B52AA6E4}">
-                <adec:decorative xmlns:adec="http://schemas.microsoft.com/office/drawing/2017/decorative" xmlns="" val="1"/>
-              </a:ext>
-            </a:extLst>
-          </p:cNvPr>
-          <p:cNvSpPr>
-            <a:spLocks noGrp="1" noRot="1" noChangeAspect="1" noMove="1" noResize="1" noEditPoints="1" noAdjustHandles="1" noChangeArrowheads="1" noChangeShapeType="1" noTextEdit="1"/>
-          </p:cNvSpPr>
-          <p:nvPr>
-            <p:extLst>
-              <p:ext uri="{386F3935-93C4-4BCD-93E2-E3B085C9AB24}">
-                <p16:designElem xmlns:p16="http://schemas.microsoft.com/office/powerpoint/2015/main" val="1"/>
-              </p:ext>
-            </p:extLst>
-          </p:nvPr>
-        </p:nvSpPr>
-        <p:spPr>
-          <a:xfrm rot="5400000">
-            <a:off x="5307777" y="-5307778"/>
-            <a:ext cx="1576446" cy="12192002"/>
-          </a:xfrm>
-          <a:prstGeom prst="rect">
-            <a:avLst/>
-          </a:prstGeom>
-          <a:gradFill>
-            <a:gsLst>
-              <a:gs pos="23000">
-                <a:schemeClr val="accent1">
-                  <a:alpha val="0"/>
-                </a:schemeClr>
-              </a:gs>
-              <a:gs pos="99000">
-                <a:srgbClr val="000000">
-                  <a:alpha val="74000"/>
-                </a:srgbClr>
-              </a:gs>
-            </a:gsLst>
-            <a:lin ang="20400000" scaled="0"/>
-          </a:gradFill>
-          <a:ln>
-            <a:noFill/>
-          </a:ln>
-        </p:spPr>
-        <p:style>
-          <a:lnRef idx="2">
-            <a:schemeClr val="accent1">
-              <a:shade val="50000"/>
-            </a:schemeClr>
-          </a:lnRef>
-          <a:fillRef idx="1">
-            <a:schemeClr val="accent1"/>
-          </a:fillRef>
-          <a:effectRef idx="0">
-            <a:schemeClr val="accent1"/>
-          </a:effectRef>
-          <a:fontRef idx="minor">
-            <a:schemeClr val="lt1"/>
-          </a:fontRef>
-        </p:style>
-        <p:txBody>
-          <a:bodyPr rtlCol="0" anchor="ctr"/>
-          <a:lstStyle/>
-          <a:p>
-            <a:pPr algn="ctr"/>
-            <a:endParaRPr lang="en-US" dirty="0"/>
-          </a:p>
-        </p:txBody>
-      </p:sp>
-      <p:sp>
-        <p:nvSpPr>
-          <p:cNvPr id="2" name="Title 1">
-            <a:extLst>
-              <a:ext uri="{FF2B5EF4-FFF2-40B4-BE49-F238E27FC236}">
-                <a16:creationId xmlns:a16="http://schemas.microsoft.com/office/drawing/2014/main" id="{171B9CEC-647F-C0D3-DB5C-9FEF0382357C}"/>
-              </a:ext>
-            </a:extLst>
-          </p:cNvPr>
-          <p:cNvSpPr>
-            <a:spLocks noGrp="1"/>
-          </p:cNvSpPr>
-          <p:nvPr>
-            <p:ph type="title"/>
-          </p:nvPr>
-        </p:nvSpPr>
-        <p:spPr>
-          <a:xfrm>
-            <a:off x="1371597" y="348865"/>
-            <a:ext cx="10044023" cy="877729"/>
-          </a:xfrm>
-        </p:spPr>
-        <p:txBody>
-          <a:bodyPr anchor="ctr">
-            <a:normAutofit/>
-          </a:bodyPr>
-          <a:lstStyle/>
-          <a:p>
-            <a:r>
-              <a:rPr lang="en-GB" sz="4000" dirty="0" smtClean="0">
-                <a:solidFill>
-                  <a:srgbClr val="FFFFFF"/>
-                </a:solidFill>
-                <a:latin typeface="Times New Roman" panose="02020603050405020304" pitchFamily="18" charset="0"/>
-                <a:cs typeface="Times New Roman" panose="02020603050405020304" pitchFamily="18" charset="0"/>
-              </a:rPr>
-              <a:t>C</a:t>
-            </a:r>
-            <a:r>
-              <a:rPr lang="en-US" sz="4000" dirty="0" err="1" smtClean="0">
-                <a:solidFill>
-                  <a:srgbClr val="FFFFFF"/>
-                </a:solidFill>
-                <a:latin typeface="Times New Roman" panose="02020603050405020304" pitchFamily="18" charset="0"/>
-                <a:cs typeface="Times New Roman" panose="02020603050405020304" pitchFamily="18" charset="0"/>
-              </a:rPr>
-              <a:t>ompleted</a:t>
-            </a:r>
-            <a:r>
-              <a:rPr lang="en-US" sz="4000" dirty="0" smtClean="0">
-                <a:solidFill>
-                  <a:srgbClr val="FFFFFF"/>
-                </a:solidFill>
-                <a:latin typeface="Times New Roman" panose="02020603050405020304" pitchFamily="18" charset="0"/>
-                <a:cs typeface="Times New Roman" panose="02020603050405020304" pitchFamily="18" charset="0"/>
-              </a:rPr>
-              <a:t> &amp; Future Enhancement</a:t>
-            </a:r>
-            <a:endParaRPr lang="en-US" sz="4000" dirty="0">
-              <a:solidFill>
-                <a:srgbClr val="FFFFFF"/>
-              </a:solidFill>
-              <a:latin typeface="Times New Roman" panose="02020603050405020304" pitchFamily="18" charset="0"/>
-              <a:cs typeface="Times New Roman" panose="02020603050405020304" pitchFamily="18" charset="0"/>
-            </a:endParaRPr>
-          </a:p>
-        </p:txBody>
-      </p:sp>
-      <p:sp>
-        <p:nvSpPr>
-          <p:cNvPr id="4" name="Content Placeholder 3">
-            <a:extLst>
-              <a:ext uri="{FF2B5EF4-FFF2-40B4-BE49-F238E27FC236}">
-                <a16:creationId xmlns:a16="http://schemas.microsoft.com/office/drawing/2014/main" id="{00EA02E6-DDCE-0B9C-54FC-4D6AC56D669B}"/>
-              </a:ext>
-            </a:extLst>
-          </p:cNvPr>
-          <p:cNvSpPr>
-            <a:spLocks noGrp="1"/>
-          </p:cNvSpPr>
-          <p:nvPr>
-            <p:ph idx="1"/>
-          </p:nvPr>
-        </p:nvSpPr>
-        <p:spPr>
-          <a:xfrm>
-            <a:off x="504665" y="1994270"/>
-            <a:ext cx="5284980" cy="4091147"/>
-          </a:xfrm>
-        </p:spPr>
-        <p:txBody>
-          <a:bodyPr>
-            <a:noAutofit/>
-          </a:bodyPr>
-          <a:lstStyle/>
-          <a:p>
-            <a:pPr>
-              <a:lnSpc>
-                <a:spcPct val="150000"/>
-              </a:lnSpc>
-            </a:pPr>
-            <a:r>
-              <a:rPr lang="en-GB" dirty="0">
-                <a:latin typeface="Times New Roman" panose="02020603050405020304" pitchFamily="18" charset="0"/>
-                <a:cs typeface="Times New Roman" panose="02020603050405020304" pitchFamily="18" charset="0"/>
-              </a:rPr>
-              <a:t>Advanced Herb Image Classifier: Improved the image classifier for higher accuracy</a:t>
-            </a:r>
-            <a:r>
-              <a:rPr lang="en-GB" dirty="0" smtClean="0">
-                <a:latin typeface="Times New Roman" panose="02020603050405020304" pitchFamily="18" charset="0"/>
-                <a:cs typeface="Times New Roman" panose="02020603050405020304" pitchFamily="18" charset="0"/>
-              </a:rPr>
-              <a:t>.</a:t>
-            </a:r>
-          </a:p>
-          <a:p>
-            <a:pPr>
-              <a:lnSpc>
-                <a:spcPct val="150000"/>
-              </a:lnSpc>
-            </a:pPr>
-            <a:r>
-              <a:rPr lang="en-GB" dirty="0" smtClean="0">
-                <a:latin typeface="Times New Roman" panose="02020603050405020304" pitchFamily="18" charset="0"/>
-                <a:cs typeface="Times New Roman" panose="02020603050405020304" pitchFamily="18" charset="0"/>
-              </a:rPr>
-              <a:t>Advanced </a:t>
-            </a:r>
-            <a:r>
-              <a:rPr lang="en-GB" dirty="0" err="1" smtClean="0">
-                <a:latin typeface="Times New Roman" panose="02020603050405020304" pitchFamily="18" charset="0"/>
-                <a:cs typeface="Times New Roman" panose="02020603050405020304" pitchFamily="18" charset="0"/>
-              </a:rPr>
-              <a:t>Chatbot</a:t>
-            </a:r>
-            <a:r>
-              <a:rPr lang="en-GB" dirty="0" smtClean="0">
-                <a:latin typeface="Times New Roman" panose="02020603050405020304" pitchFamily="18" charset="0"/>
-                <a:cs typeface="Times New Roman" panose="02020603050405020304" pitchFamily="18" charset="0"/>
-              </a:rPr>
-              <a:t>: Enhanced </a:t>
-            </a:r>
-            <a:r>
-              <a:rPr lang="en-GB" dirty="0">
-                <a:latin typeface="Times New Roman" panose="02020603050405020304" pitchFamily="18" charset="0"/>
-                <a:cs typeface="Times New Roman" panose="02020603050405020304" pitchFamily="18" charset="0"/>
-              </a:rPr>
-              <a:t>the </a:t>
-            </a:r>
-            <a:r>
-              <a:rPr lang="en-GB" dirty="0" err="1">
-                <a:latin typeface="Times New Roman" panose="02020603050405020304" pitchFamily="18" charset="0"/>
-                <a:cs typeface="Times New Roman" panose="02020603050405020304" pitchFamily="18" charset="0"/>
-              </a:rPr>
-              <a:t>Chatbot</a:t>
-            </a:r>
-            <a:r>
-              <a:rPr lang="en-GB" dirty="0">
-                <a:latin typeface="Times New Roman" panose="02020603050405020304" pitchFamily="18" charset="0"/>
-                <a:cs typeface="Times New Roman" panose="02020603050405020304" pitchFamily="18" charset="0"/>
-              </a:rPr>
-              <a:t> to handle more complex queries. </a:t>
-            </a:r>
-          </a:p>
-        </p:txBody>
-      </p:sp>
-      <p:sp>
-        <p:nvSpPr>
-          <p:cNvPr id="8" name="Content Placeholder 3">
-            <a:extLst>
-              <a:ext uri="{FF2B5EF4-FFF2-40B4-BE49-F238E27FC236}">
-                <a16:creationId xmlns:a16="http://schemas.microsoft.com/office/drawing/2014/main" id="{00EA02E6-DDCE-0B9C-54FC-4D6AC56D669B}"/>
-              </a:ext>
-            </a:extLst>
-          </p:cNvPr>
-          <p:cNvSpPr txBox="1">
-            <a:spLocks/>
-          </p:cNvSpPr>
-          <p:nvPr/>
-        </p:nvSpPr>
-        <p:spPr>
-          <a:xfrm>
-            <a:off x="6294310" y="1835650"/>
-            <a:ext cx="5807494" cy="4835738"/>
-          </a:xfrm>
-          <a:prstGeom prst="rect">
-            <a:avLst/>
-          </a:prstGeom>
-        </p:spPr>
-        <p:txBody>
-          <a:bodyPr vert="horz" lIns="91440" tIns="45720" rIns="91440" bIns="45720" rtlCol="0">
-            <a:noAutofit/>
-          </a:bodyPr>
-          <a:lstStyle>
-            <a:lvl1pPr marL="228600" indent="-228600" algn="l" defTabSz="914400" rtl="0" eaLnBrk="1" latinLnBrk="0" hangingPunct="1">
-              <a:lnSpc>
-                <a:spcPct val="90000"/>
-              </a:lnSpc>
-              <a:spcBef>
-                <a:spcPts val="1000"/>
-              </a:spcBef>
-              <a:buFont typeface="Arial" panose="020B0604020202020204" pitchFamily="34" charset="0"/>
-              <a:buChar char="•"/>
-              <a:defRPr sz="2800" kern="1200">
-                <a:solidFill>
-                  <a:schemeClr val="tx1"/>
-                </a:solidFill>
-                <a:latin typeface="+mn-lt"/>
-                <a:ea typeface="+mn-ea"/>
-                <a:cs typeface="+mn-cs"/>
-              </a:defRPr>
-            </a:lvl1pPr>
-            <a:lvl2pPr marL="685800" indent="-228600" algn="l" defTabSz="914400" rtl="0" eaLnBrk="1" latinLnBrk="0" hangingPunct="1">
-              <a:lnSpc>
-                <a:spcPct val="90000"/>
-              </a:lnSpc>
-              <a:spcBef>
-                <a:spcPts val="500"/>
-              </a:spcBef>
-              <a:buFont typeface="Arial" panose="020B0604020202020204" pitchFamily="34" charset="0"/>
-              <a:buChar char="•"/>
-              <a:defRPr sz="2400" kern="1200">
-                <a:solidFill>
-                  <a:schemeClr val="tx1"/>
-                </a:solidFill>
-                <a:latin typeface="+mn-lt"/>
-                <a:ea typeface="+mn-ea"/>
-                <a:cs typeface="+mn-cs"/>
-              </a:defRPr>
-            </a:lvl2pPr>
-            <a:lvl3pPr marL="1143000" indent="-228600" algn="l" defTabSz="914400" rtl="0" eaLnBrk="1" latinLnBrk="0" hangingPunct="1">
-              <a:lnSpc>
-                <a:spcPct val="90000"/>
-              </a:lnSpc>
-              <a:spcBef>
-                <a:spcPts val="500"/>
-              </a:spcBef>
-              <a:buFont typeface="Arial" panose="020B0604020202020204" pitchFamily="34" charset="0"/>
-              <a:buChar char="•"/>
-              <a:defRPr sz="2000" kern="1200">
-                <a:solidFill>
-                  <a:schemeClr val="tx1"/>
-                </a:solidFill>
-                <a:latin typeface="+mn-lt"/>
-                <a:ea typeface="+mn-ea"/>
-                <a:cs typeface="+mn-cs"/>
-              </a:defRPr>
-            </a:lvl3pPr>
-            <a:lvl4pPr marL="1600200" indent="-228600" algn="l" defTabSz="914400" rtl="0" eaLnBrk="1" latinLnBrk="0" hangingPunct="1">
-              <a:lnSpc>
-                <a:spcPct val="90000"/>
-              </a:lnSpc>
-              <a:spcBef>
-                <a:spcPts val="500"/>
-              </a:spcBef>
-              <a:buFont typeface="Arial" panose="020B0604020202020204" pitchFamily="34" charset="0"/>
-              <a:buChar char="•"/>
-              <a:defRPr sz="1800" kern="1200">
-                <a:solidFill>
-                  <a:schemeClr val="tx1"/>
-                </a:solidFill>
-                <a:latin typeface="+mn-lt"/>
-                <a:ea typeface="+mn-ea"/>
-                <a:cs typeface="+mn-cs"/>
-              </a:defRPr>
-            </a:lvl4pPr>
-            <a:lvl5pPr marL="2057400" indent="-228600" algn="l" defTabSz="914400" rtl="0" eaLnBrk="1" latinLnBrk="0" hangingPunct="1">
-              <a:lnSpc>
-                <a:spcPct val="90000"/>
-              </a:lnSpc>
-              <a:spcBef>
-                <a:spcPts val="500"/>
-              </a:spcBef>
-              <a:buFont typeface="Arial" panose="020B0604020202020204" pitchFamily="34" charset="0"/>
-              <a:buChar char="•"/>
-              <a:defRPr sz="1800" kern="1200">
-                <a:solidFill>
-                  <a:schemeClr val="tx1"/>
-                </a:solidFill>
-                <a:latin typeface="+mn-lt"/>
-                <a:ea typeface="+mn-ea"/>
-                <a:cs typeface="+mn-cs"/>
-              </a:defRPr>
-            </a:lvl5pPr>
-            <a:lvl6pPr marL="2514600" indent="-228600" algn="l" defTabSz="914400" rtl="0" eaLnBrk="1" latinLnBrk="0" hangingPunct="1">
-              <a:lnSpc>
-                <a:spcPct val="90000"/>
-              </a:lnSpc>
-              <a:spcBef>
-                <a:spcPts val="500"/>
-              </a:spcBef>
-              <a:buFont typeface="Arial" panose="020B0604020202020204" pitchFamily="34" charset="0"/>
-              <a:buChar char="•"/>
-              <a:defRPr sz="1800" kern="1200">
-                <a:solidFill>
-                  <a:schemeClr val="tx1"/>
-                </a:solidFill>
-                <a:latin typeface="+mn-lt"/>
-                <a:ea typeface="+mn-ea"/>
-                <a:cs typeface="+mn-cs"/>
-              </a:defRPr>
-            </a:lvl6pPr>
-            <a:lvl7pPr marL="2971800" indent="-228600" algn="l" defTabSz="914400" rtl="0" eaLnBrk="1" latinLnBrk="0" hangingPunct="1">
-              <a:lnSpc>
-                <a:spcPct val="90000"/>
-              </a:lnSpc>
-              <a:spcBef>
-                <a:spcPts val="500"/>
-              </a:spcBef>
-              <a:buFont typeface="Arial" panose="020B0604020202020204" pitchFamily="34" charset="0"/>
-              <a:buChar char="•"/>
-              <a:defRPr sz="1800" kern="1200">
-                <a:solidFill>
-                  <a:schemeClr val="tx1"/>
-                </a:solidFill>
-                <a:latin typeface="+mn-lt"/>
-                <a:ea typeface="+mn-ea"/>
-                <a:cs typeface="+mn-cs"/>
-              </a:defRPr>
-            </a:lvl7pPr>
-            <a:lvl8pPr marL="3429000" indent="-228600" algn="l" defTabSz="914400" rtl="0" eaLnBrk="1" latinLnBrk="0" hangingPunct="1">
-              <a:lnSpc>
-                <a:spcPct val="90000"/>
-              </a:lnSpc>
-              <a:spcBef>
-                <a:spcPts val="500"/>
-              </a:spcBef>
-              <a:buFont typeface="Arial" panose="020B0604020202020204" pitchFamily="34" charset="0"/>
-              <a:buChar char="•"/>
-              <a:defRPr sz="1800" kern="1200">
-                <a:solidFill>
-                  <a:schemeClr val="tx1"/>
-                </a:solidFill>
-                <a:latin typeface="+mn-lt"/>
-                <a:ea typeface="+mn-ea"/>
-                <a:cs typeface="+mn-cs"/>
-              </a:defRPr>
-            </a:lvl8pPr>
-            <a:lvl9pPr marL="3886200" indent="-228600" algn="l" defTabSz="914400" rtl="0" eaLnBrk="1" latinLnBrk="0" hangingPunct="1">
-              <a:lnSpc>
-                <a:spcPct val="90000"/>
-              </a:lnSpc>
-              <a:spcBef>
-                <a:spcPts val="500"/>
-              </a:spcBef>
-              <a:buFont typeface="Arial" panose="020B0604020202020204" pitchFamily="34" charset="0"/>
-              <a:buChar char="•"/>
-              <a:defRPr sz="1800" kern="1200">
-                <a:solidFill>
-                  <a:schemeClr val="tx1"/>
-                </a:solidFill>
-                <a:latin typeface="+mn-lt"/>
-                <a:ea typeface="+mn-ea"/>
-                <a:cs typeface="+mn-cs"/>
-              </a:defRPr>
-            </a:lvl9pPr>
-          </a:lstStyle>
-          <a:p>
-            <a:pPr>
-              <a:lnSpc>
-                <a:spcPct val="150000"/>
-              </a:lnSpc>
-            </a:pPr>
-            <a:r>
-              <a:rPr lang="en-GB" sz="2400" dirty="0" smtClean="0">
-                <a:latin typeface="Times New Roman" panose="02020603050405020304" pitchFamily="18" charset="0"/>
-                <a:cs typeface="Times New Roman" panose="02020603050405020304" pitchFamily="18" charset="0"/>
-              </a:rPr>
-              <a:t>Real time video based plant recognition</a:t>
-            </a:r>
-          </a:p>
-          <a:p>
-            <a:pPr>
-              <a:lnSpc>
-                <a:spcPct val="150000"/>
-              </a:lnSpc>
-            </a:pPr>
-            <a:r>
-              <a:rPr lang="en-US" sz="2400" dirty="0" smtClean="0">
-                <a:latin typeface="Times New Roman" panose="02020603050405020304" pitchFamily="18" charset="0"/>
-                <a:cs typeface="Times New Roman" panose="02020603050405020304" pitchFamily="18" charset="0"/>
-              </a:rPr>
-              <a:t>Voice Based Symptom Input and Conversation</a:t>
-            </a:r>
-            <a:endParaRPr lang="en-US" sz="2400" dirty="0">
-              <a:latin typeface="Times New Roman" panose="02020603050405020304" pitchFamily="18" charset="0"/>
-              <a:cs typeface="Times New Roman" panose="02020603050405020304" pitchFamily="18" charset="0"/>
-            </a:endParaRPr>
-          </a:p>
-        </p:txBody>
-      </p:sp>
-    </p:spTree>
-    <p:extLst>
-      <p:ext uri="{BB962C8B-B14F-4D97-AF65-F5344CB8AC3E}">
-        <p14:creationId xmlns:p14="http://schemas.microsoft.com/office/powerpoint/2010/main" val="158060555"/>
-      </p:ext>
-    </p:extLst>
-  </p:cSld>
-  <p:clrMapOvr>
-    <a:masterClrMapping/>
-  </p:clrMapOvr>
-  <p:timing>
-    <p:tnLst>
-      <p:par>
-        <p:cTn id="1" dur="indefinite" restart="never" nodeType="tmRoot"/>
-      </p:par>
-    </p:tnLst>
-  </p:timing>
-</p:sld>
-</file>
-
-<file path=ppt/slides/slide19.xml><?xml version="1.0" encoding="utf-8"?>
-<p:sld xmlns:a="http://schemas.openxmlformats.org/drawingml/2006/main" xmlns:r="http://schemas.openxmlformats.org/officeDocument/2006/relationships" xmlns:p="http://schemas.openxmlformats.org/presentationml/2006/main">
-  <p:cSld>
-    <p:spTree>
-      <p:nvGrpSpPr>
-        <p:cNvPr id="1" name=""/>
-        <p:cNvGrpSpPr/>
-        <p:nvPr/>
-      </p:nvGrpSpPr>
-      <p:grpSpPr>
-        <a:xfrm>
-          <a:off x="0" y="0"/>
-          <a:ext cx="0" cy="0"/>
-          <a:chOff x="0" y="0"/>
-          <a:chExt cx="0" cy="0"/>
-        </a:xfrm>
-      </p:grpSpPr>
-      <p:graphicFrame>
-        <p:nvGraphicFramePr>
-          <p:cNvPr id="8" name="TextBox 2">
-            <a:extLst>
-              <a:ext uri="{FF2B5EF4-FFF2-40B4-BE49-F238E27FC236}">
-                <a16:creationId xmlns:a16="http://schemas.microsoft.com/office/drawing/2014/main" id="{3510E40D-A03E-BDD0-9406-8D3E4BA93559}"/>
-              </a:ext>
-            </a:extLst>
-          </p:cNvPr>
-          <p:cNvGraphicFramePr/>
-          <p:nvPr>
-            <p:extLst>
-              <p:ext uri="{D42A27DB-BD31-4B8C-83A1-F6EECF244321}">
-                <p14:modId xmlns:p14="http://schemas.microsoft.com/office/powerpoint/2010/main" val="527879398"/>
-              </p:ext>
-            </p:extLst>
-          </p:nvPr>
-        </p:nvGraphicFramePr>
-        <p:xfrm>
-          <a:off x="1562531" y="770276"/>
-          <a:ext cx="9078627" cy="5178149"/>
-        </p:xfrm>
-        <a:graphic>
-          <a:graphicData uri="http://schemas.openxmlformats.org/drawingml/2006/diagram">
-            <dgm:relIds xmlns:dgm="http://schemas.openxmlformats.org/drawingml/2006/diagram" xmlns:r="http://schemas.openxmlformats.org/officeDocument/2006/relationships" r:dm="rId2" r:lo="rId3" r:qs="rId4" r:cs="rId5"/>
-          </a:graphicData>
-        </a:graphic>
-      </p:graphicFrame>
-    </p:spTree>
-  </p:cSld>
-  <p:clrMapOvr>
-    <a:masterClrMapping/>
-  </p:clrMapOvr>
 </p:sld>
 </file>
 
@@ -24374,6 +24486,816 @@
         <p14:creationId xmlns:p14="http://schemas.microsoft.com/office/powerpoint/2010/main" val="96977832"/>
       </p:ext>
     </p:extLst>
+  </p:cSld>
+  <p:clrMapOvr>
+    <a:masterClrMapping/>
+  </p:clrMapOvr>
+  <p:timing>
+    <p:tnLst>
+      <p:par>
+        <p:cTn id="1" dur="indefinite" restart="never" nodeType="tmRoot"/>
+      </p:par>
+    </p:tnLst>
+  </p:timing>
+</p:sld>
+</file>
+
+<file path=ppt/slides/slide20.xml><?xml version="1.0" encoding="utf-8"?>
+<p:sld xmlns:a="http://schemas.openxmlformats.org/drawingml/2006/main" xmlns:r="http://schemas.openxmlformats.org/officeDocument/2006/relationships" xmlns:p="http://schemas.openxmlformats.org/presentationml/2006/main">
+  <p:cSld>
+    <p:bg>
+      <p:bgPr>
+        <a:solidFill>
+          <a:schemeClr val="bg1"/>
+        </a:solidFill>
+        <a:effectLst/>
+      </p:bgPr>
+    </p:bg>
+    <p:spTree>
+      <p:nvGrpSpPr>
+        <p:cNvPr id="1" name=""/>
+        <p:cNvGrpSpPr/>
+        <p:nvPr/>
+      </p:nvGrpSpPr>
+      <p:grpSpPr>
+        <a:xfrm>
+          <a:off x="0" y="0"/>
+          <a:ext cx="0" cy="0"/>
+          <a:chOff x="0" y="0"/>
+          <a:chExt cx="0" cy="0"/>
+        </a:xfrm>
+      </p:grpSpPr>
+      <p:sp useBgFill="1">
+        <p:nvSpPr>
+          <p:cNvPr id="10" name="Rectangle 9">
+            <a:extLst>
+              <a:ext uri="{FF2B5EF4-FFF2-40B4-BE49-F238E27FC236}">
+                <a16:creationId xmlns:a16="http://schemas.microsoft.com/office/drawing/2014/main" id="{BACC6370-2D7E-4714-9D71-7542949D7D5D}"/>
+              </a:ext>
+              <a:ext uri="{C183D7F6-B498-43B3-948B-1728B52AA6E4}">
+                <adec:decorative xmlns:adec="http://schemas.microsoft.com/office/drawing/2017/decorative" xmlns="" val="1"/>
+              </a:ext>
+            </a:extLst>
+          </p:cNvPr>
+          <p:cNvSpPr>
+            <a:spLocks noGrp="1" noRot="1" noChangeAspect="1" noMove="1" noResize="1" noEditPoints="1" noAdjustHandles="1" noChangeArrowheads="1" noChangeShapeType="1" noTextEdit="1"/>
+          </p:cNvSpPr>
+          <p:nvPr>
+            <p:extLst>
+              <p:ext uri="{386F3935-93C4-4BCD-93E2-E3B085C9AB24}">
+                <p16:designElem xmlns:p16="http://schemas.microsoft.com/office/powerpoint/2015/main" val="1"/>
+              </p:ext>
+            </p:extLst>
+          </p:nvPr>
+        </p:nvSpPr>
+        <p:spPr>
+          <a:xfrm>
+            <a:off x="0" y="0"/>
+            <a:ext cx="12192000" cy="6858000"/>
+          </a:xfrm>
+          <a:prstGeom prst="rect">
+            <a:avLst/>
+          </a:prstGeom>
+          <a:ln w="12700" cap="flat" cmpd="sng" algn="ctr">
+            <a:noFill/>
+            <a:prstDash val="solid"/>
+            <a:miter lim="800000"/>
+          </a:ln>
+          <a:effectLst/>
+          <a:extLst>
+            <a:ext uri="{91240B29-F687-4F45-9708-019B960494DF}">
+              <a14:hiddenLine xmlns:a14="http://schemas.microsoft.com/office/drawing/2010/main" w="12700" cap="flat" cmpd="sng" algn="ctr">
+                <a:solidFill>
+                  <a:schemeClr val="accent1">
+                    <a:shade val="50000"/>
+                  </a:schemeClr>
+                </a:solidFill>
+                <a:prstDash val="solid"/>
+                <a:miter lim="800000"/>
+              </a14:hiddenLine>
+            </a:ext>
+          </a:extLst>
+        </p:spPr>
+        <p:style>
+          <a:lnRef idx="2">
+            <a:schemeClr val="accent1">
+              <a:shade val="50000"/>
+            </a:schemeClr>
+          </a:lnRef>
+          <a:fillRef idx="1">
+            <a:schemeClr val="accent1"/>
+          </a:fillRef>
+          <a:effectRef idx="0">
+            <a:schemeClr val="accent1"/>
+          </a:effectRef>
+          <a:fontRef idx="minor">
+            <a:schemeClr val="lt1"/>
+          </a:fontRef>
+        </p:style>
+        <p:txBody>
+          <a:bodyPr rtlCol="0" anchor="ctr"/>
+          <a:lstStyle/>
+          <a:p>
+            <a:pPr algn="ctr"/>
+            <a:endParaRPr lang="en-US"/>
+          </a:p>
+        </p:txBody>
+      </p:sp>
+      <p:sp>
+        <p:nvSpPr>
+          <p:cNvPr id="12" name="Rectangle 11">
+            <a:extLst>
+              <a:ext uri="{FF2B5EF4-FFF2-40B4-BE49-F238E27FC236}">
+                <a16:creationId xmlns:a16="http://schemas.microsoft.com/office/drawing/2014/main" id="{F68B3F68-107C-434F-AA38-110D5EA91B85}"/>
+              </a:ext>
+              <a:ext uri="{C183D7F6-B498-43B3-948B-1728B52AA6E4}">
+                <adec:decorative xmlns:adec="http://schemas.microsoft.com/office/drawing/2017/decorative" xmlns="" val="1"/>
+              </a:ext>
+            </a:extLst>
+          </p:cNvPr>
+          <p:cNvSpPr>
+            <a:spLocks noGrp="1" noRot="1" noChangeAspect="1" noMove="1" noResize="1" noEditPoints="1" noAdjustHandles="1" noChangeArrowheads="1" noChangeShapeType="1" noTextEdit="1"/>
+          </p:cNvSpPr>
+          <p:nvPr>
+            <p:extLst>
+              <p:ext uri="{386F3935-93C4-4BCD-93E2-E3B085C9AB24}">
+                <p16:designElem xmlns:p16="http://schemas.microsoft.com/office/powerpoint/2015/main" val="1"/>
+              </p:ext>
+            </p:extLst>
+          </p:nvPr>
+        </p:nvSpPr>
+        <p:spPr>
+          <a:xfrm flipH="1">
+            <a:off x="2" y="0"/>
+            <a:ext cx="12191998" cy="1575955"/>
+          </a:xfrm>
+          <a:prstGeom prst="rect">
+            <a:avLst/>
+          </a:prstGeom>
+          <a:gradFill>
+            <a:gsLst>
+              <a:gs pos="0">
+                <a:srgbClr val="000000">
+                  <a:alpha val="96000"/>
+                </a:srgbClr>
+              </a:gs>
+              <a:gs pos="100000">
+                <a:schemeClr val="accent1">
+                  <a:lumMod val="75000"/>
+                </a:schemeClr>
+              </a:gs>
+            </a:gsLst>
+            <a:lin ang="8400000" scaled="0"/>
+          </a:gradFill>
+          <a:ln>
+            <a:noFill/>
+          </a:ln>
+        </p:spPr>
+        <p:style>
+          <a:lnRef idx="2">
+            <a:schemeClr val="accent1">
+              <a:shade val="50000"/>
+            </a:schemeClr>
+          </a:lnRef>
+          <a:fillRef idx="1">
+            <a:schemeClr val="accent1"/>
+          </a:fillRef>
+          <a:effectRef idx="0">
+            <a:schemeClr val="accent1"/>
+          </a:effectRef>
+          <a:fontRef idx="minor">
+            <a:schemeClr val="lt1"/>
+          </a:fontRef>
+        </p:style>
+        <p:txBody>
+          <a:bodyPr rtlCol="0" anchor="ctr"/>
+          <a:lstStyle/>
+          <a:p>
+            <a:pPr algn="ctr"/>
+            <a:endParaRPr lang="en-US"/>
+          </a:p>
+        </p:txBody>
+      </p:sp>
+      <p:sp>
+        <p:nvSpPr>
+          <p:cNvPr id="14" name="Rectangle 13">
+            <a:extLst>
+              <a:ext uri="{FF2B5EF4-FFF2-40B4-BE49-F238E27FC236}">
+                <a16:creationId xmlns:a16="http://schemas.microsoft.com/office/drawing/2014/main" id="{AAD0DBB9-1A4B-4391-81D4-CB19F9AB918A}"/>
+              </a:ext>
+              <a:ext uri="{C183D7F6-B498-43B3-948B-1728B52AA6E4}">
+                <adec:decorative xmlns:adec="http://schemas.microsoft.com/office/drawing/2017/decorative" xmlns="" val="1"/>
+              </a:ext>
+            </a:extLst>
+          </p:cNvPr>
+          <p:cNvSpPr>
+            <a:spLocks noGrp="1" noRot="1" noChangeAspect="1" noMove="1" noResize="1" noEditPoints="1" noAdjustHandles="1" noChangeArrowheads="1" noChangeShapeType="1" noTextEdit="1"/>
+          </p:cNvSpPr>
+          <p:nvPr>
+            <p:extLst>
+              <p:ext uri="{386F3935-93C4-4BCD-93E2-E3B085C9AB24}">
+                <p16:designElem xmlns:p16="http://schemas.microsoft.com/office/powerpoint/2015/main" val="1"/>
+              </p:ext>
+            </p:extLst>
+          </p:nvPr>
+        </p:nvSpPr>
+        <p:spPr>
+          <a:xfrm rot="10800000" flipH="1">
+            <a:off x="8128857" y="0"/>
+            <a:ext cx="4063143" cy="1576412"/>
+          </a:xfrm>
+          <a:prstGeom prst="rect">
+            <a:avLst/>
+          </a:prstGeom>
+          <a:gradFill>
+            <a:gsLst>
+              <a:gs pos="19000">
+                <a:schemeClr val="accent1">
+                  <a:lumMod val="50000"/>
+                  <a:alpha val="68000"/>
+                </a:schemeClr>
+              </a:gs>
+              <a:gs pos="100000">
+                <a:schemeClr val="accent1">
+                  <a:alpha val="79000"/>
+                </a:schemeClr>
+              </a:gs>
+            </a:gsLst>
+            <a:lin ang="19200000" scaled="0"/>
+          </a:gradFill>
+          <a:ln>
+            <a:noFill/>
+          </a:ln>
+        </p:spPr>
+        <p:style>
+          <a:lnRef idx="2">
+            <a:schemeClr val="accent1">
+              <a:shade val="50000"/>
+            </a:schemeClr>
+          </a:lnRef>
+          <a:fillRef idx="1">
+            <a:schemeClr val="accent1"/>
+          </a:fillRef>
+          <a:effectRef idx="0">
+            <a:schemeClr val="accent1"/>
+          </a:effectRef>
+          <a:fontRef idx="minor">
+            <a:schemeClr val="lt1"/>
+          </a:fontRef>
+        </p:style>
+        <p:txBody>
+          <a:bodyPr rtlCol="0" anchor="ctr"/>
+          <a:lstStyle/>
+          <a:p>
+            <a:pPr algn="ctr"/>
+            <a:endParaRPr lang="en-US"/>
+          </a:p>
+        </p:txBody>
+      </p:sp>
+      <p:sp>
+        <p:nvSpPr>
+          <p:cNvPr id="16" name="Rectangle 15">
+            <a:extLst>
+              <a:ext uri="{FF2B5EF4-FFF2-40B4-BE49-F238E27FC236}">
+                <a16:creationId xmlns:a16="http://schemas.microsoft.com/office/drawing/2014/main" id="{063BBA22-50EA-4C4D-BE05-F1CE4E63AA56}"/>
+              </a:ext>
+              <a:ext uri="{C183D7F6-B498-43B3-948B-1728B52AA6E4}">
+                <adec:decorative xmlns:adec="http://schemas.microsoft.com/office/drawing/2017/decorative" xmlns="" val="1"/>
+              </a:ext>
+            </a:extLst>
+          </p:cNvPr>
+          <p:cNvSpPr>
+            <a:spLocks noGrp="1" noRot="1" noChangeAspect="1" noMove="1" noResize="1" noEditPoints="1" noAdjustHandles="1" noChangeArrowheads="1" noChangeShapeType="1" noTextEdit="1"/>
+          </p:cNvSpPr>
+          <p:nvPr>
+            <p:extLst>
+              <p:ext uri="{386F3935-93C4-4BCD-93E2-E3B085C9AB24}">
+                <p16:designElem xmlns:p16="http://schemas.microsoft.com/office/powerpoint/2015/main" val="1"/>
+              </p:ext>
+            </p:extLst>
+          </p:nvPr>
+        </p:nvSpPr>
+        <p:spPr>
+          <a:xfrm rot="5400000">
+            <a:off x="5307777" y="-5307778"/>
+            <a:ext cx="1576446" cy="12192002"/>
+          </a:xfrm>
+          <a:prstGeom prst="rect">
+            <a:avLst/>
+          </a:prstGeom>
+          <a:gradFill>
+            <a:gsLst>
+              <a:gs pos="23000">
+                <a:schemeClr val="accent1">
+                  <a:alpha val="0"/>
+                </a:schemeClr>
+              </a:gs>
+              <a:gs pos="99000">
+                <a:srgbClr val="000000">
+                  <a:alpha val="74000"/>
+                </a:srgbClr>
+              </a:gs>
+            </a:gsLst>
+            <a:lin ang="20400000" scaled="0"/>
+          </a:gradFill>
+          <a:ln>
+            <a:noFill/>
+          </a:ln>
+        </p:spPr>
+        <p:style>
+          <a:lnRef idx="2">
+            <a:schemeClr val="accent1">
+              <a:shade val="50000"/>
+            </a:schemeClr>
+          </a:lnRef>
+          <a:fillRef idx="1">
+            <a:schemeClr val="accent1"/>
+          </a:fillRef>
+          <a:effectRef idx="0">
+            <a:schemeClr val="accent1"/>
+          </a:effectRef>
+          <a:fontRef idx="minor">
+            <a:schemeClr val="lt1"/>
+          </a:fontRef>
+        </p:style>
+        <p:txBody>
+          <a:bodyPr rtlCol="0" anchor="ctr"/>
+          <a:lstStyle/>
+          <a:p>
+            <a:pPr algn="ctr"/>
+            <a:endParaRPr lang="en-US" dirty="0"/>
+          </a:p>
+        </p:txBody>
+      </p:sp>
+      <p:sp>
+        <p:nvSpPr>
+          <p:cNvPr id="2" name="Title 1">
+            <a:extLst>
+              <a:ext uri="{FF2B5EF4-FFF2-40B4-BE49-F238E27FC236}">
+                <a16:creationId xmlns:a16="http://schemas.microsoft.com/office/drawing/2014/main" id="{171B9CEC-647F-C0D3-DB5C-9FEF0382357C}"/>
+              </a:ext>
+            </a:extLst>
+          </p:cNvPr>
+          <p:cNvSpPr>
+            <a:spLocks noGrp="1"/>
+          </p:cNvSpPr>
+          <p:nvPr>
+            <p:ph type="title"/>
+          </p:nvPr>
+        </p:nvSpPr>
+        <p:spPr>
+          <a:xfrm>
+            <a:off x="1371597" y="348865"/>
+            <a:ext cx="10044023" cy="877729"/>
+          </a:xfrm>
+        </p:spPr>
+        <p:txBody>
+          <a:bodyPr anchor="ctr">
+            <a:normAutofit/>
+          </a:bodyPr>
+          <a:lstStyle/>
+          <a:p>
+            <a:r>
+              <a:rPr lang="en-GB" sz="4000" dirty="0" smtClean="0">
+                <a:solidFill>
+                  <a:srgbClr val="FFFFFF"/>
+                </a:solidFill>
+                <a:latin typeface="Times New Roman" panose="02020603050405020304" pitchFamily="18" charset="0"/>
+                <a:cs typeface="Times New Roman" panose="02020603050405020304" pitchFamily="18" charset="0"/>
+              </a:rPr>
+              <a:t>C</a:t>
+            </a:r>
+            <a:r>
+              <a:rPr lang="en-US" sz="4000" dirty="0" smtClean="0">
+                <a:solidFill>
+                  <a:srgbClr val="FFFFFF"/>
+                </a:solidFill>
+                <a:latin typeface="Times New Roman" panose="02020603050405020304" pitchFamily="18" charset="0"/>
+                <a:cs typeface="Times New Roman" panose="02020603050405020304" pitchFamily="18" charset="0"/>
+              </a:rPr>
+              <a:t>OMPLETED &amp; FUTURE ENHANCEMENT</a:t>
+            </a:r>
+            <a:endParaRPr lang="en-US" sz="4000" dirty="0">
+              <a:solidFill>
+                <a:srgbClr val="FFFFFF"/>
+              </a:solidFill>
+              <a:latin typeface="Times New Roman" panose="02020603050405020304" pitchFamily="18" charset="0"/>
+              <a:cs typeface="Times New Roman" panose="02020603050405020304" pitchFamily="18" charset="0"/>
+            </a:endParaRPr>
+          </a:p>
+        </p:txBody>
+      </p:sp>
+      <p:sp>
+        <p:nvSpPr>
+          <p:cNvPr id="4" name="Content Placeholder 3">
+            <a:extLst>
+              <a:ext uri="{FF2B5EF4-FFF2-40B4-BE49-F238E27FC236}">
+                <a16:creationId xmlns:a16="http://schemas.microsoft.com/office/drawing/2014/main" id="{00EA02E6-DDCE-0B9C-54FC-4D6AC56D669B}"/>
+              </a:ext>
+            </a:extLst>
+          </p:cNvPr>
+          <p:cNvSpPr>
+            <a:spLocks noGrp="1"/>
+          </p:cNvSpPr>
+          <p:nvPr>
+            <p:ph idx="1"/>
+          </p:nvPr>
+        </p:nvSpPr>
+        <p:spPr>
+          <a:xfrm>
+            <a:off x="504665" y="1994270"/>
+            <a:ext cx="5284980" cy="4091147"/>
+          </a:xfrm>
+        </p:spPr>
+        <p:txBody>
+          <a:bodyPr>
+            <a:noAutofit/>
+          </a:bodyPr>
+          <a:lstStyle/>
+          <a:p>
+            <a:pPr>
+              <a:lnSpc>
+                <a:spcPct val="150000"/>
+              </a:lnSpc>
+            </a:pPr>
+            <a:r>
+              <a:rPr lang="en-GB" dirty="0">
+                <a:latin typeface="Times New Roman" panose="02020603050405020304" pitchFamily="18" charset="0"/>
+                <a:cs typeface="Times New Roman" panose="02020603050405020304" pitchFamily="18" charset="0"/>
+              </a:rPr>
+              <a:t>Advanced Herb Image Classifier: Improved the image classifier for higher accuracy</a:t>
+            </a:r>
+            <a:r>
+              <a:rPr lang="en-GB" dirty="0" smtClean="0">
+                <a:latin typeface="Times New Roman" panose="02020603050405020304" pitchFamily="18" charset="0"/>
+                <a:cs typeface="Times New Roman" panose="02020603050405020304" pitchFamily="18" charset="0"/>
+              </a:rPr>
+              <a:t>.</a:t>
+            </a:r>
+          </a:p>
+          <a:p>
+            <a:pPr>
+              <a:lnSpc>
+                <a:spcPct val="150000"/>
+              </a:lnSpc>
+            </a:pPr>
+            <a:r>
+              <a:rPr lang="en-GB" dirty="0" smtClean="0">
+                <a:latin typeface="Times New Roman" panose="02020603050405020304" pitchFamily="18" charset="0"/>
+                <a:cs typeface="Times New Roman" panose="02020603050405020304" pitchFamily="18" charset="0"/>
+              </a:rPr>
+              <a:t>Advanced </a:t>
+            </a:r>
+            <a:r>
+              <a:rPr lang="en-GB" dirty="0" err="1" smtClean="0">
+                <a:latin typeface="Times New Roman" panose="02020603050405020304" pitchFamily="18" charset="0"/>
+                <a:cs typeface="Times New Roman" panose="02020603050405020304" pitchFamily="18" charset="0"/>
+              </a:rPr>
+              <a:t>Chatbot</a:t>
+            </a:r>
+            <a:r>
+              <a:rPr lang="en-GB" dirty="0" smtClean="0">
+                <a:latin typeface="Times New Roman" panose="02020603050405020304" pitchFamily="18" charset="0"/>
+                <a:cs typeface="Times New Roman" panose="02020603050405020304" pitchFamily="18" charset="0"/>
+              </a:rPr>
+              <a:t>: Enhanced </a:t>
+            </a:r>
+            <a:r>
+              <a:rPr lang="en-GB" dirty="0">
+                <a:latin typeface="Times New Roman" panose="02020603050405020304" pitchFamily="18" charset="0"/>
+                <a:cs typeface="Times New Roman" panose="02020603050405020304" pitchFamily="18" charset="0"/>
+              </a:rPr>
+              <a:t>the </a:t>
+            </a:r>
+            <a:r>
+              <a:rPr lang="en-GB" dirty="0" err="1">
+                <a:latin typeface="Times New Roman" panose="02020603050405020304" pitchFamily="18" charset="0"/>
+                <a:cs typeface="Times New Roman" panose="02020603050405020304" pitchFamily="18" charset="0"/>
+              </a:rPr>
+              <a:t>Chatbot</a:t>
+            </a:r>
+            <a:r>
+              <a:rPr lang="en-GB" dirty="0">
+                <a:latin typeface="Times New Roman" panose="02020603050405020304" pitchFamily="18" charset="0"/>
+                <a:cs typeface="Times New Roman" panose="02020603050405020304" pitchFamily="18" charset="0"/>
+              </a:rPr>
+              <a:t> to handle more complex queries. </a:t>
+            </a:r>
+          </a:p>
+        </p:txBody>
+      </p:sp>
+      <p:sp>
+        <p:nvSpPr>
+          <p:cNvPr id="8" name="Content Placeholder 3">
+            <a:extLst>
+              <a:ext uri="{FF2B5EF4-FFF2-40B4-BE49-F238E27FC236}">
+                <a16:creationId xmlns:a16="http://schemas.microsoft.com/office/drawing/2014/main" id="{00EA02E6-DDCE-0B9C-54FC-4D6AC56D669B}"/>
+              </a:ext>
+            </a:extLst>
+          </p:cNvPr>
+          <p:cNvSpPr txBox="1">
+            <a:spLocks/>
+          </p:cNvSpPr>
+          <p:nvPr/>
+        </p:nvSpPr>
+        <p:spPr>
+          <a:xfrm>
+            <a:off x="6294310" y="1835650"/>
+            <a:ext cx="5807494" cy="4835738"/>
+          </a:xfrm>
+          <a:prstGeom prst="rect">
+            <a:avLst/>
+          </a:prstGeom>
+        </p:spPr>
+        <p:txBody>
+          <a:bodyPr vert="horz" lIns="91440" tIns="45720" rIns="91440" bIns="45720" rtlCol="0">
+            <a:noAutofit/>
+          </a:bodyPr>
+          <a:lstStyle>
+            <a:lvl1pPr marL="228600" indent="-228600" algn="l" defTabSz="914400" rtl="0" eaLnBrk="1" latinLnBrk="0" hangingPunct="1">
+              <a:lnSpc>
+                <a:spcPct val="90000"/>
+              </a:lnSpc>
+              <a:spcBef>
+                <a:spcPts val="1000"/>
+              </a:spcBef>
+              <a:buFont typeface="Arial" panose="020B0604020202020204" pitchFamily="34" charset="0"/>
+              <a:buChar char="•"/>
+              <a:defRPr sz="2800" kern="1200">
+                <a:solidFill>
+                  <a:schemeClr val="tx1"/>
+                </a:solidFill>
+                <a:latin typeface="+mn-lt"/>
+                <a:ea typeface="+mn-ea"/>
+                <a:cs typeface="+mn-cs"/>
+              </a:defRPr>
+            </a:lvl1pPr>
+            <a:lvl2pPr marL="685800" indent="-228600" algn="l" defTabSz="914400" rtl="0" eaLnBrk="1" latinLnBrk="0" hangingPunct="1">
+              <a:lnSpc>
+                <a:spcPct val="90000"/>
+              </a:lnSpc>
+              <a:spcBef>
+                <a:spcPts val="500"/>
+              </a:spcBef>
+              <a:buFont typeface="Arial" panose="020B0604020202020204" pitchFamily="34" charset="0"/>
+              <a:buChar char="•"/>
+              <a:defRPr sz="2400" kern="1200">
+                <a:solidFill>
+                  <a:schemeClr val="tx1"/>
+                </a:solidFill>
+                <a:latin typeface="+mn-lt"/>
+                <a:ea typeface="+mn-ea"/>
+                <a:cs typeface="+mn-cs"/>
+              </a:defRPr>
+            </a:lvl2pPr>
+            <a:lvl3pPr marL="1143000" indent="-228600" algn="l" defTabSz="914400" rtl="0" eaLnBrk="1" latinLnBrk="0" hangingPunct="1">
+              <a:lnSpc>
+                <a:spcPct val="90000"/>
+              </a:lnSpc>
+              <a:spcBef>
+                <a:spcPts val="500"/>
+              </a:spcBef>
+              <a:buFont typeface="Arial" panose="020B0604020202020204" pitchFamily="34" charset="0"/>
+              <a:buChar char="•"/>
+              <a:defRPr sz="2000" kern="1200">
+                <a:solidFill>
+                  <a:schemeClr val="tx1"/>
+                </a:solidFill>
+                <a:latin typeface="+mn-lt"/>
+                <a:ea typeface="+mn-ea"/>
+                <a:cs typeface="+mn-cs"/>
+              </a:defRPr>
+            </a:lvl3pPr>
+            <a:lvl4pPr marL="1600200" indent="-228600" algn="l" defTabSz="914400" rtl="0" eaLnBrk="1" latinLnBrk="0" hangingPunct="1">
+              <a:lnSpc>
+                <a:spcPct val="90000"/>
+              </a:lnSpc>
+              <a:spcBef>
+                <a:spcPts val="500"/>
+              </a:spcBef>
+              <a:buFont typeface="Arial" panose="020B0604020202020204" pitchFamily="34" charset="0"/>
+              <a:buChar char="•"/>
+              <a:defRPr sz="1800" kern="1200">
+                <a:solidFill>
+                  <a:schemeClr val="tx1"/>
+                </a:solidFill>
+                <a:latin typeface="+mn-lt"/>
+                <a:ea typeface="+mn-ea"/>
+                <a:cs typeface="+mn-cs"/>
+              </a:defRPr>
+            </a:lvl4pPr>
+            <a:lvl5pPr marL="2057400" indent="-228600" algn="l" defTabSz="914400" rtl="0" eaLnBrk="1" latinLnBrk="0" hangingPunct="1">
+              <a:lnSpc>
+                <a:spcPct val="90000"/>
+              </a:lnSpc>
+              <a:spcBef>
+                <a:spcPts val="500"/>
+              </a:spcBef>
+              <a:buFont typeface="Arial" panose="020B0604020202020204" pitchFamily="34" charset="0"/>
+              <a:buChar char="•"/>
+              <a:defRPr sz="1800" kern="1200">
+                <a:solidFill>
+                  <a:schemeClr val="tx1"/>
+                </a:solidFill>
+                <a:latin typeface="+mn-lt"/>
+                <a:ea typeface="+mn-ea"/>
+                <a:cs typeface="+mn-cs"/>
+              </a:defRPr>
+            </a:lvl5pPr>
+            <a:lvl6pPr marL="2514600" indent="-228600" algn="l" defTabSz="914400" rtl="0" eaLnBrk="1" latinLnBrk="0" hangingPunct="1">
+              <a:lnSpc>
+                <a:spcPct val="90000"/>
+              </a:lnSpc>
+              <a:spcBef>
+                <a:spcPts val="500"/>
+              </a:spcBef>
+              <a:buFont typeface="Arial" panose="020B0604020202020204" pitchFamily="34" charset="0"/>
+              <a:buChar char="•"/>
+              <a:defRPr sz="1800" kern="1200">
+                <a:solidFill>
+                  <a:schemeClr val="tx1"/>
+                </a:solidFill>
+                <a:latin typeface="+mn-lt"/>
+                <a:ea typeface="+mn-ea"/>
+                <a:cs typeface="+mn-cs"/>
+              </a:defRPr>
+            </a:lvl6pPr>
+            <a:lvl7pPr marL="2971800" indent="-228600" algn="l" defTabSz="914400" rtl="0" eaLnBrk="1" latinLnBrk="0" hangingPunct="1">
+              <a:lnSpc>
+                <a:spcPct val="90000"/>
+              </a:lnSpc>
+              <a:spcBef>
+                <a:spcPts val="500"/>
+              </a:spcBef>
+              <a:buFont typeface="Arial" panose="020B0604020202020204" pitchFamily="34" charset="0"/>
+              <a:buChar char="•"/>
+              <a:defRPr sz="1800" kern="1200">
+                <a:solidFill>
+                  <a:schemeClr val="tx1"/>
+                </a:solidFill>
+                <a:latin typeface="+mn-lt"/>
+                <a:ea typeface="+mn-ea"/>
+                <a:cs typeface="+mn-cs"/>
+              </a:defRPr>
+            </a:lvl7pPr>
+            <a:lvl8pPr marL="3429000" indent="-228600" algn="l" defTabSz="914400" rtl="0" eaLnBrk="1" latinLnBrk="0" hangingPunct="1">
+              <a:lnSpc>
+                <a:spcPct val="90000"/>
+              </a:lnSpc>
+              <a:spcBef>
+                <a:spcPts val="500"/>
+              </a:spcBef>
+              <a:buFont typeface="Arial" panose="020B0604020202020204" pitchFamily="34" charset="0"/>
+              <a:buChar char="•"/>
+              <a:defRPr sz="1800" kern="1200">
+                <a:solidFill>
+                  <a:schemeClr val="tx1"/>
+                </a:solidFill>
+                <a:latin typeface="+mn-lt"/>
+                <a:ea typeface="+mn-ea"/>
+                <a:cs typeface="+mn-cs"/>
+              </a:defRPr>
+            </a:lvl8pPr>
+            <a:lvl9pPr marL="3886200" indent="-228600" algn="l" defTabSz="914400" rtl="0" eaLnBrk="1" latinLnBrk="0" hangingPunct="1">
+              <a:lnSpc>
+                <a:spcPct val="90000"/>
+              </a:lnSpc>
+              <a:spcBef>
+                <a:spcPts val="500"/>
+              </a:spcBef>
+              <a:buFont typeface="Arial" panose="020B0604020202020204" pitchFamily="34" charset="0"/>
+              <a:buChar char="•"/>
+              <a:defRPr sz="1800" kern="1200">
+                <a:solidFill>
+                  <a:schemeClr val="tx1"/>
+                </a:solidFill>
+                <a:latin typeface="+mn-lt"/>
+                <a:ea typeface="+mn-ea"/>
+                <a:cs typeface="+mn-cs"/>
+              </a:defRPr>
+            </a:lvl9pPr>
+          </a:lstStyle>
+          <a:p>
+            <a:pPr>
+              <a:lnSpc>
+                <a:spcPct val="150000"/>
+              </a:lnSpc>
+            </a:pPr>
+            <a:r>
+              <a:rPr lang="en-GB" sz="2400" dirty="0" smtClean="0">
+                <a:latin typeface="Times New Roman" panose="02020603050405020304" pitchFamily="18" charset="0"/>
+                <a:cs typeface="Times New Roman" panose="02020603050405020304" pitchFamily="18" charset="0"/>
+              </a:rPr>
+              <a:t>Android App for plant recognition</a:t>
+            </a:r>
+          </a:p>
+          <a:p>
+            <a:pPr>
+              <a:lnSpc>
+                <a:spcPct val="150000"/>
+              </a:lnSpc>
+            </a:pPr>
+            <a:r>
+              <a:rPr lang="en-GB" sz="2400" dirty="0" smtClean="0">
+                <a:latin typeface="Times New Roman" panose="02020603050405020304" pitchFamily="18" charset="0"/>
+                <a:cs typeface="Times New Roman" panose="02020603050405020304" pitchFamily="18" charset="0"/>
+              </a:rPr>
+              <a:t>Real </a:t>
+            </a:r>
+            <a:r>
+              <a:rPr lang="en-GB" sz="2400" dirty="0" smtClean="0">
+                <a:latin typeface="Times New Roman" panose="02020603050405020304" pitchFamily="18" charset="0"/>
+                <a:cs typeface="Times New Roman" panose="02020603050405020304" pitchFamily="18" charset="0"/>
+              </a:rPr>
+              <a:t>time video based plant recognition</a:t>
+            </a:r>
+          </a:p>
+          <a:p>
+            <a:pPr>
+              <a:lnSpc>
+                <a:spcPct val="150000"/>
+              </a:lnSpc>
+            </a:pPr>
+            <a:r>
+              <a:rPr lang="en-US" sz="2400" dirty="0" smtClean="0">
+                <a:latin typeface="Times New Roman" panose="02020603050405020304" pitchFamily="18" charset="0"/>
+                <a:cs typeface="Times New Roman" panose="02020603050405020304" pitchFamily="18" charset="0"/>
+              </a:rPr>
+              <a:t>Voice Based Symptom Input and Conversation</a:t>
+            </a:r>
+            <a:endParaRPr lang="en-US" sz="2400" dirty="0">
+              <a:latin typeface="Times New Roman" panose="02020603050405020304" pitchFamily="18" charset="0"/>
+              <a:cs typeface="Times New Roman" panose="02020603050405020304" pitchFamily="18" charset="0"/>
+            </a:endParaRPr>
+          </a:p>
+        </p:txBody>
+      </p:sp>
+    </p:spTree>
+    <p:extLst>
+      <p:ext uri="{BB962C8B-B14F-4D97-AF65-F5344CB8AC3E}">
+        <p14:creationId xmlns:p14="http://schemas.microsoft.com/office/powerpoint/2010/main" val="158060555"/>
+      </p:ext>
+    </p:extLst>
+  </p:cSld>
+  <p:clrMapOvr>
+    <a:masterClrMapping/>
+  </p:clrMapOvr>
+  <p:timing>
+    <p:tnLst>
+      <p:par>
+        <p:cTn id="1" dur="indefinite" restart="never" nodeType="tmRoot"/>
+      </p:par>
+    </p:tnLst>
+  </p:timing>
+</p:sld>
+</file>
+
+<file path=ppt/slides/slide21.xml><?xml version="1.0" encoding="utf-8"?>
+<p:sld xmlns:a="http://schemas.openxmlformats.org/drawingml/2006/main" xmlns:r="http://schemas.openxmlformats.org/officeDocument/2006/relationships" xmlns:p="http://schemas.openxmlformats.org/presentationml/2006/main">
+  <p:cSld>
+    <p:spTree>
+      <p:nvGrpSpPr>
+        <p:cNvPr id="1" name=""/>
+        <p:cNvGrpSpPr/>
+        <p:nvPr/>
+      </p:nvGrpSpPr>
+      <p:grpSpPr>
+        <a:xfrm>
+          <a:off x="0" y="0"/>
+          <a:ext cx="0" cy="0"/>
+          <a:chOff x="0" y="0"/>
+          <a:chExt cx="0" cy="0"/>
+        </a:xfrm>
+      </p:grpSpPr>
+      <p:graphicFrame>
+        <p:nvGraphicFramePr>
+          <p:cNvPr id="8" name="TextBox 2">
+            <a:extLst>
+              <a:ext uri="{FF2B5EF4-FFF2-40B4-BE49-F238E27FC236}">
+                <a16:creationId xmlns:a16="http://schemas.microsoft.com/office/drawing/2014/main" id="{3510E40D-A03E-BDD0-9406-8D3E4BA93559}"/>
+              </a:ext>
+            </a:extLst>
+          </p:cNvPr>
+          <p:cNvGraphicFramePr/>
+          <p:nvPr>
+            <p:extLst>
+              <p:ext uri="{D42A27DB-BD31-4B8C-83A1-F6EECF244321}">
+                <p14:modId xmlns:p14="http://schemas.microsoft.com/office/powerpoint/2010/main" val="527879398"/>
+              </p:ext>
+            </p:extLst>
+          </p:nvPr>
+        </p:nvGraphicFramePr>
+        <p:xfrm>
+          <a:off x="1562531" y="770276"/>
+          <a:ext cx="9078627" cy="5178149"/>
+        </p:xfrm>
+        <a:graphic>
+          <a:graphicData uri="http://schemas.openxmlformats.org/drawingml/2006/diagram">
+            <dgm:relIds xmlns:dgm="http://schemas.openxmlformats.org/drawingml/2006/diagram" xmlns:r="http://schemas.openxmlformats.org/officeDocument/2006/relationships" r:dm="rId2" r:lo="rId3" r:qs="rId4" r:cs="rId5"/>
+          </a:graphicData>
+        </a:graphic>
+      </p:graphicFrame>
+    </p:spTree>
   </p:cSld>
   <p:clrMapOvr>
     <a:masterClrMapping/>
@@ -27329,7 +28251,7 @@
             <p:ph idx="1"/>
             <p:extLst>
               <p:ext uri="{D42A27DB-BD31-4B8C-83A1-F6EECF244321}">
-                <p14:modId xmlns:p14="http://schemas.microsoft.com/office/powerpoint/2010/main" val="1760102859"/>
+                <p14:modId xmlns:p14="http://schemas.microsoft.com/office/powerpoint/2010/main" val="4291401687"/>
               </p:ext>
             </p:extLst>
           </p:nvPr>
